--- a/Strategy_Sarsabz_Sep/workspace/out/Sarsabz_case1_deck-v2.pptx
+++ b/Strategy_Sarsabz_Sep/workspace/out/Sarsabz_case1_deck-v2.pptx
@@ -5,27 +5,27 @@
     <p:sldMasterId id="2147483648" r:id="rId1"/>
   </p:sldMasterIdLst>
   <p:sldIdLst>
-    <p:sldId id="256" r:id="rId7"/>
-    <p:sldId id="257" r:id="rId8"/>
-    <p:sldId id="258" r:id="rId9"/>
-    <p:sldId id="259" r:id="rId10"/>
-    <p:sldId id="260" r:id="rId11"/>
-    <p:sldId id="261" r:id="rId12"/>
-    <p:sldId id="262" r:id="rId13"/>
-    <p:sldId id="263" r:id="rId14"/>
-    <p:sldId id="264" r:id="rId15"/>
-    <p:sldId id="265" r:id="rId16"/>
-    <p:sldId id="266" r:id="rId17"/>
-    <p:sldId id="267" r:id="rId18"/>
-    <p:sldId id="268" r:id="rId19"/>
-    <p:sldId id="269" r:id="rId20"/>
-    <p:sldId id="270" r:id="rId21"/>
-    <p:sldId id="271" r:id="rId22"/>
-    <p:sldId id="272" r:id="rId23"/>
-    <p:sldId id="273" r:id="rId24"/>
-    <p:sldId id="274" r:id="rId25"/>
+    <p:sldId id="256" r:id="rId2"/>
+    <p:sldId id="257" r:id="rId3"/>
+    <p:sldId id="258" r:id="rId4"/>
+    <p:sldId id="259" r:id="rId5"/>
+    <p:sldId id="260" r:id="rId6"/>
+    <p:sldId id="261" r:id="rId7"/>
+    <p:sldId id="262" r:id="rId8"/>
+    <p:sldId id="263" r:id="rId9"/>
+    <p:sldId id="264" r:id="rId10"/>
+    <p:sldId id="265" r:id="rId11"/>
+    <p:sldId id="266" r:id="rId12"/>
+    <p:sldId id="267" r:id="rId13"/>
+    <p:sldId id="268" r:id="rId14"/>
+    <p:sldId id="269" r:id="rId15"/>
+    <p:sldId id="270" r:id="rId16"/>
+    <p:sldId id="271" r:id="rId17"/>
+    <p:sldId id="272" r:id="rId18"/>
+    <p:sldId id="273" r:id="rId19"/>
+    <p:sldId id="274" r:id="rId20"/>
   </p:sldIdLst>
-  <p:sldSz cx="12191695" cy="6858000" type="screen4x3"/>
+  <p:sldSz cx="12192000" cy="6858000"/>
   <p:notesSz cx="6858000" cy="9144000"/>
   <p:defaultTextStyle>
     <a:defPPr>
@@ -122,6 +122,22 @@
       </a:defRPr>
     </a:lvl9pPr>
   </p:defaultTextStyle>
+  <p:extLst>
+    <p:ext uri="{EFAFB233-063F-42B5-8137-9DF3F51BA10A}">
+      <p15:sldGuideLst xmlns:p15="http://schemas.microsoft.com/office/powerpoint/2012/main">
+        <p15:guide id="1" orient="horz" pos="2160">
+          <p15:clr>
+            <a:srgbClr val="A4A3A4"/>
+          </p15:clr>
+        </p15:guide>
+        <p15:guide id="2" pos="2880">
+          <p15:clr>
+            <a:srgbClr val="A4A3A4"/>
+          </p15:clr>
+        </p15:guide>
+      </p15:sldGuideLst>
+    </p:ext>
+  </p:extLst>
 </p:presentation>
 </file>
 
@@ -163,10 +179,9 @@
           <a:lstStyle/>
           <a:p>
             <a:r>
-              <a:rPr lang="en-US" smtClean="0"/>
+              <a:rPr lang="en-US"/>
               <a:t>Click to edit Master title style</a:t>
             </a:r>
-            <a:endParaRPr lang="en-US"/>
           </a:p>
         </p:txBody>
       </p:sp>
@@ -282,10 +297,9 @@
           </a:lstStyle>
           <a:p>
             <a:r>
-              <a:rPr lang="en-US" smtClean="0"/>
+              <a:rPr lang="en-US"/>
               <a:t>Click to edit Master subtitle style</a:t>
             </a:r>
-            <a:endParaRPr lang="en-US"/>
           </a:p>
         </p:txBody>
       </p:sp>
@@ -306,7 +320,7 @@
           <a:p>
             <a:fld id="{5BCAD085-E8A6-8845-BD4E-CB4CCA059FC4}" type="datetimeFigureOut">
               <a:rPr lang="en-US" smtClean="0"/>
-              <a:t>1/27/13</a:t>
+              <a:t>9/15/2026</a:t>
             </a:fld>
             <a:endParaRPr lang="en-US"/>
           </a:p>
@@ -400,10 +414,9 @@
           <a:lstStyle/>
           <a:p>
             <a:r>
-              <a:rPr lang="en-US" smtClean="0"/>
+              <a:rPr lang="en-US"/>
               <a:t>Click to edit Master title style</a:t>
             </a:r>
-            <a:endParaRPr lang="en-US"/>
           </a:p>
         </p:txBody>
       </p:sp>
@@ -424,38 +437,37 @@
           <a:p>
             <a:pPr lvl="0"/>
             <a:r>
-              <a:rPr lang="en-US" smtClean="0"/>
+              <a:rPr lang="en-US"/>
               <a:t>Click to edit Master text styles</a:t>
             </a:r>
           </a:p>
           <a:p>
             <a:pPr lvl="1"/>
             <a:r>
-              <a:rPr lang="en-US" smtClean="0"/>
+              <a:rPr lang="en-US"/>
               <a:t>Second level</a:t>
             </a:r>
           </a:p>
           <a:p>
             <a:pPr lvl="2"/>
             <a:r>
-              <a:rPr lang="en-US" smtClean="0"/>
+              <a:rPr lang="en-US"/>
               <a:t>Third level</a:t>
             </a:r>
           </a:p>
           <a:p>
             <a:pPr lvl="3"/>
             <a:r>
-              <a:rPr lang="en-US" smtClean="0"/>
+              <a:rPr lang="en-US"/>
               <a:t>Fourth level</a:t>
             </a:r>
           </a:p>
           <a:p>
             <a:pPr lvl="4"/>
             <a:r>
-              <a:rPr lang="en-US" smtClean="0"/>
+              <a:rPr lang="en-US"/>
               <a:t>Fifth level</a:t>
             </a:r>
-            <a:endParaRPr lang="en-US"/>
           </a:p>
         </p:txBody>
       </p:sp>
@@ -476,7 +488,7 @@
           <a:p>
             <a:fld id="{5BCAD085-E8A6-8845-BD4E-CB4CCA059FC4}" type="datetimeFigureOut">
               <a:rPr lang="en-US" smtClean="0"/>
-              <a:t>1/27/13</a:t>
+              <a:t>9/15/2026</a:t>
             </a:fld>
             <a:endParaRPr lang="en-US"/>
           </a:p>
@@ -575,10 +587,9 @@
           <a:lstStyle/>
           <a:p>
             <a:r>
-              <a:rPr lang="en-US" smtClean="0"/>
+              <a:rPr lang="en-US"/>
               <a:t>Click to edit Master title style</a:t>
             </a:r>
-            <a:endParaRPr lang="en-US"/>
           </a:p>
         </p:txBody>
       </p:sp>
@@ -604,38 +615,37 @@
           <a:p>
             <a:pPr lvl="0"/>
             <a:r>
-              <a:rPr lang="en-US" smtClean="0"/>
+              <a:rPr lang="en-US"/>
               <a:t>Click to edit Master text styles</a:t>
             </a:r>
           </a:p>
           <a:p>
             <a:pPr lvl="1"/>
             <a:r>
-              <a:rPr lang="en-US" smtClean="0"/>
+              <a:rPr lang="en-US"/>
               <a:t>Second level</a:t>
             </a:r>
           </a:p>
           <a:p>
             <a:pPr lvl="2"/>
             <a:r>
-              <a:rPr lang="en-US" smtClean="0"/>
+              <a:rPr lang="en-US"/>
               <a:t>Third level</a:t>
             </a:r>
           </a:p>
           <a:p>
             <a:pPr lvl="3"/>
             <a:r>
-              <a:rPr lang="en-US" smtClean="0"/>
+              <a:rPr lang="en-US"/>
               <a:t>Fourth level</a:t>
             </a:r>
           </a:p>
           <a:p>
             <a:pPr lvl="4"/>
             <a:r>
-              <a:rPr lang="en-US" smtClean="0"/>
+              <a:rPr lang="en-US"/>
               <a:t>Fifth level</a:t>
             </a:r>
-            <a:endParaRPr lang="en-US"/>
           </a:p>
         </p:txBody>
       </p:sp>
@@ -656,7 +666,7 @@
           <a:p>
             <a:fld id="{5BCAD085-E8A6-8845-BD4E-CB4CCA059FC4}" type="datetimeFigureOut">
               <a:rPr lang="en-US" smtClean="0"/>
-              <a:t>1/27/13</a:t>
+              <a:t>9/15/2026</a:t>
             </a:fld>
             <a:endParaRPr lang="en-US"/>
           </a:p>
@@ -750,10 +760,9 @@
           <a:lstStyle/>
           <a:p>
             <a:r>
-              <a:rPr lang="en-US" smtClean="0"/>
+              <a:rPr lang="en-US"/>
               <a:t>Click to edit Master title style</a:t>
             </a:r>
-            <a:endParaRPr lang="en-US"/>
           </a:p>
         </p:txBody>
       </p:sp>
@@ -774,38 +783,37 @@
           <a:p>
             <a:pPr lvl="0"/>
             <a:r>
-              <a:rPr lang="en-US" smtClean="0"/>
+              <a:rPr lang="en-US"/>
               <a:t>Click to edit Master text styles</a:t>
             </a:r>
           </a:p>
           <a:p>
             <a:pPr lvl="1"/>
             <a:r>
-              <a:rPr lang="en-US" smtClean="0"/>
+              <a:rPr lang="en-US"/>
               <a:t>Second level</a:t>
             </a:r>
           </a:p>
           <a:p>
             <a:pPr lvl="2"/>
             <a:r>
-              <a:rPr lang="en-US" smtClean="0"/>
+              <a:rPr lang="en-US"/>
               <a:t>Third level</a:t>
             </a:r>
           </a:p>
           <a:p>
             <a:pPr lvl="3"/>
             <a:r>
-              <a:rPr lang="en-US" smtClean="0"/>
+              <a:rPr lang="en-US"/>
               <a:t>Fourth level</a:t>
             </a:r>
           </a:p>
           <a:p>
             <a:pPr lvl="4"/>
             <a:r>
-              <a:rPr lang="en-US" smtClean="0"/>
+              <a:rPr lang="en-US"/>
               <a:t>Fifth level</a:t>
             </a:r>
-            <a:endParaRPr lang="en-US"/>
           </a:p>
         </p:txBody>
       </p:sp>
@@ -826,7 +834,7 @@
           <a:p>
             <a:fld id="{5BCAD085-E8A6-8845-BD4E-CB4CCA059FC4}" type="datetimeFigureOut">
               <a:rPr lang="en-US" smtClean="0"/>
-              <a:t>1/27/13</a:t>
+              <a:t>9/15/2026</a:t>
             </a:fld>
             <a:endParaRPr lang="en-US"/>
           </a:p>
@@ -929,10 +937,9 @@
           </a:lstStyle>
           <a:p>
             <a:r>
-              <a:rPr lang="en-US" smtClean="0"/>
+              <a:rPr lang="en-US"/>
               <a:t>Click to edit Master title style</a:t>
             </a:r>
-            <a:endParaRPr lang="en-US"/>
           </a:p>
         </p:txBody>
       </p:sp>
@@ -1049,7 +1056,7 @@
           <a:p>
             <a:pPr lvl="0"/>
             <a:r>
-              <a:rPr lang="en-US" smtClean="0"/>
+              <a:rPr lang="en-US"/>
               <a:t>Click to edit Master text styles</a:t>
             </a:r>
           </a:p>
@@ -1072,7 +1079,7 @@
           <a:p>
             <a:fld id="{5BCAD085-E8A6-8845-BD4E-CB4CCA059FC4}" type="datetimeFigureOut">
               <a:rPr lang="en-US" smtClean="0"/>
-              <a:t>1/27/13</a:t>
+              <a:t>9/15/2026</a:t>
             </a:fld>
             <a:endParaRPr lang="en-US"/>
           </a:p>
@@ -1166,10 +1173,9 @@
           <a:lstStyle/>
           <a:p>
             <a:r>
-              <a:rPr lang="en-US" smtClean="0"/>
+              <a:rPr lang="en-US"/>
               <a:t>Click to edit Master title style</a:t>
             </a:r>
-            <a:endParaRPr lang="en-US"/>
           </a:p>
         </p:txBody>
       </p:sp>
@@ -1223,38 +1229,37 @@
           <a:p>
             <a:pPr lvl="0"/>
             <a:r>
-              <a:rPr lang="en-US" smtClean="0"/>
+              <a:rPr lang="en-US"/>
               <a:t>Click to edit Master text styles</a:t>
             </a:r>
           </a:p>
           <a:p>
             <a:pPr lvl="1"/>
             <a:r>
-              <a:rPr lang="en-US" smtClean="0"/>
+              <a:rPr lang="en-US"/>
               <a:t>Second level</a:t>
             </a:r>
           </a:p>
           <a:p>
             <a:pPr lvl="2"/>
             <a:r>
-              <a:rPr lang="en-US" smtClean="0"/>
+              <a:rPr lang="en-US"/>
               <a:t>Third level</a:t>
             </a:r>
           </a:p>
           <a:p>
             <a:pPr lvl="3"/>
             <a:r>
-              <a:rPr lang="en-US" smtClean="0"/>
+              <a:rPr lang="en-US"/>
               <a:t>Fourth level</a:t>
             </a:r>
           </a:p>
           <a:p>
             <a:pPr lvl="4"/>
             <a:r>
-              <a:rPr lang="en-US" smtClean="0"/>
+              <a:rPr lang="en-US"/>
               <a:t>Fifth level</a:t>
             </a:r>
-            <a:endParaRPr lang="en-US"/>
           </a:p>
         </p:txBody>
       </p:sp>
@@ -1308,38 +1313,37 @@
           <a:p>
             <a:pPr lvl="0"/>
             <a:r>
-              <a:rPr lang="en-US" smtClean="0"/>
+              <a:rPr lang="en-US"/>
               <a:t>Click to edit Master text styles</a:t>
             </a:r>
           </a:p>
           <a:p>
             <a:pPr lvl="1"/>
             <a:r>
-              <a:rPr lang="en-US" smtClean="0"/>
+              <a:rPr lang="en-US"/>
               <a:t>Second level</a:t>
             </a:r>
           </a:p>
           <a:p>
             <a:pPr lvl="2"/>
             <a:r>
-              <a:rPr lang="en-US" smtClean="0"/>
+              <a:rPr lang="en-US"/>
               <a:t>Third level</a:t>
             </a:r>
           </a:p>
           <a:p>
             <a:pPr lvl="3"/>
             <a:r>
-              <a:rPr lang="en-US" smtClean="0"/>
+              <a:rPr lang="en-US"/>
               <a:t>Fourth level</a:t>
             </a:r>
           </a:p>
           <a:p>
             <a:pPr lvl="4"/>
             <a:r>
-              <a:rPr lang="en-US" smtClean="0"/>
+              <a:rPr lang="en-US"/>
               <a:t>Fifth level</a:t>
             </a:r>
-            <a:endParaRPr lang="en-US"/>
           </a:p>
         </p:txBody>
       </p:sp>
@@ -1360,7 +1364,7 @@
           <a:p>
             <a:fld id="{5BCAD085-E8A6-8845-BD4E-CB4CCA059FC4}" type="datetimeFigureOut">
               <a:rPr lang="en-US" smtClean="0"/>
-              <a:t>1/27/13</a:t>
+              <a:t>9/15/2026</a:t>
             </a:fld>
             <a:endParaRPr lang="en-US"/>
           </a:p>
@@ -1458,10 +1462,9 @@
           </a:lstStyle>
           <a:p>
             <a:r>
-              <a:rPr lang="en-US" smtClean="0"/>
+              <a:rPr lang="en-US"/>
               <a:t>Click to edit Master title style</a:t>
             </a:r>
-            <a:endParaRPr lang="en-US"/>
           </a:p>
         </p:txBody>
       </p:sp>
@@ -1524,7 +1527,7 @@
           <a:p>
             <a:pPr lvl="0"/>
             <a:r>
-              <a:rPr lang="en-US" smtClean="0"/>
+              <a:rPr lang="en-US"/>
               <a:t>Click to edit Master text styles</a:t>
             </a:r>
           </a:p>
@@ -1580,38 +1583,37 @@
           <a:p>
             <a:pPr lvl="0"/>
             <a:r>
-              <a:rPr lang="en-US" smtClean="0"/>
+              <a:rPr lang="en-US"/>
               <a:t>Click to edit Master text styles</a:t>
             </a:r>
           </a:p>
           <a:p>
             <a:pPr lvl="1"/>
             <a:r>
-              <a:rPr lang="en-US" smtClean="0"/>
+              <a:rPr lang="en-US"/>
               <a:t>Second level</a:t>
             </a:r>
           </a:p>
           <a:p>
             <a:pPr lvl="2"/>
             <a:r>
-              <a:rPr lang="en-US" smtClean="0"/>
+              <a:rPr lang="en-US"/>
               <a:t>Third level</a:t>
             </a:r>
           </a:p>
           <a:p>
             <a:pPr lvl="3"/>
             <a:r>
-              <a:rPr lang="en-US" smtClean="0"/>
+              <a:rPr lang="en-US"/>
               <a:t>Fourth level</a:t>
             </a:r>
           </a:p>
           <a:p>
             <a:pPr lvl="4"/>
             <a:r>
-              <a:rPr lang="en-US" smtClean="0"/>
+              <a:rPr lang="en-US"/>
               <a:t>Fifth level</a:t>
             </a:r>
-            <a:endParaRPr lang="en-US"/>
           </a:p>
         </p:txBody>
       </p:sp>
@@ -1674,7 +1676,7 @@
           <a:p>
             <a:pPr lvl="0"/>
             <a:r>
-              <a:rPr lang="en-US" smtClean="0"/>
+              <a:rPr lang="en-US"/>
               <a:t>Click to edit Master text styles</a:t>
             </a:r>
           </a:p>
@@ -1730,38 +1732,37 @@
           <a:p>
             <a:pPr lvl="0"/>
             <a:r>
-              <a:rPr lang="en-US" smtClean="0"/>
+              <a:rPr lang="en-US"/>
               <a:t>Click to edit Master text styles</a:t>
             </a:r>
           </a:p>
           <a:p>
             <a:pPr lvl="1"/>
             <a:r>
-              <a:rPr lang="en-US" smtClean="0"/>
+              <a:rPr lang="en-US"/>
               <a:t>Second level</a:t>
             </a:r>
           </a:p>
           <a:p>
             <a:pPr lvl="2"/>
             <a:r>
-              <a:rPr lang="en-US" smtClean="0"/>
+              <a:rPr lang="en-US"/>
               <a:t>Third level</a:t>
             </a:r>
           </a:p>
           <a:p>
             <a:pPr lvl="3"/>
             <a:r>
-              <a:rPr lang="en-US" smtClean="0"/>
+              <a:rPr lang="en-US"/>
               <a:t>Fourth level</a:t>
             </a:r>
           </a:p>
           <a:p>
             <a:pPr lvl="4"/>
             <a:r>
-              <a:rPr lang="en-US" smtClean="0"/>
+              <a:rPr lang="en-US"/>
               <a:t>Fifth level</a:t>
             </a:r>
-            <a:endParaRPr lang="en-US"/>
           </a:p>
         </p:txBody>
       </p:sp>
@@ -1782,7 +1783,7 @@
           <a:p>
             <a:fld id="{5BCAD085-E8A6-8845-BD4E-CB4CCA059FC4}" type="datetimeFigureOut">
               <a:rPr lang="en-US" smtClean="0"/>
-              <a:t>1/27/13</a:t>
+              <a:t>9/15/2026</a:t>
             </a:fld>
             <a:endParaRPr lang="en-US"/>
           </a:p>
@@ -1876,10 +1877,9 @@
           <a:lstStyle/>
           <a:p>
             <a:r>
-              <a:rPr lang="en-US" smtClean="0"/>
+              <a:rPr lang="en-US"/>
               <a:t>Click to edit Master title style</a:t>
             </a:r>
-            <a:endParaRPr lang="en-US"/>
           </a:p>
         </p:txBody>
       </p:sp>
@@ -1900,7 +1900,7 @@
           <a:p>
             <a:fld id="{5BCAD085-E8A6-8845-BD4E-CB4CCA059FC4}" type="datetimeFigureOut">
               <a:rPr lang="en-US" smtClean="0"/>
-              <a:t>1/27/13</a:t>
+              <a:t>9/15/2026</a:t>
             </a:fld>
             <a:endParaRPr lang="en-US"/>
           </a:p>
@@ -1995,7 +1995,7 @@
           <a:p>
             <a:fld id="{5BCAD085-E8A6-8845-BD4E-CB4CCA059FC4}" type="datetimeFigureOut">
               <a:rPr lang="en-US" smtClean="0"/>
-              <a:t>1/27/13</a:t>
+              <a:t>9/15/2026</a:t>
             </a:fld>
             <a:endParaRPr lang="en-US"/>
           </a:p>
@@ -2098,10 +2098,9 @@
           </a:lstStyle>
           <a:p>
             <a:r>
-              <a:rPr lang="en-US" smtClean="0"/>
+              <a:rPr lang="en-US"/>
               <a:t>Click to edit Master title style</a:t>
             </a:r>
-            <a:endParaRPr lang="en-US"/>
           </a:p>
         </p:txBody>
       </p:sp>
@@ -2155,38 +2154,37 @@
           <a:p>
             <a:pPr lvl="0"/>
             <a:r>
-              <a:rPr lang="en-US" smtClean="0"/>
+              <a:rPr lang="en-US"/>
               <a:t>Click to edit Master text styles</a:t>
             </a:r>
           </a:p>
           <a:p>
             <a:pPr lvl="1"/>
             <a:r>
-              <a:rPr lang="en-US" smtClean="0"/>
+              <a:rPr lang="en-US"/>
               <a:t>Second level</a:t>
             </a:r>
           </a:p>
           <a:p>
             <a:pPr lvl="2"/>
             <a:r>
-              <a:rPr lang="en-US" smtClean="0"/>
+              <a:rPr lang="en-US"/>
               <a:t>Third level</a:t>
             </a:r>
           </a:p>
           <a:p>
             <a:pPr lvl="3"/>
             <a:r>
-              <a:rPr lang="en-US" smtClean="0"/>
+              <a:rPr lang="en-US"/>
               <a:t>Fourth level</a:t>
             </a:r>
           </a:p>
           <a:p>
             <a:pPr lvl="4"/>
             <a:r>
-              <a:rPr lang="en-US" smtClean="0"/>
+              <a:rPr lang="en-US"/>
               <a:t>Fifth level</a:t>
             </a:r>
-            <a:endParaRPr lang="en-US"/>
           </a:p>
         </p:txBody>
       </p:sp>
@@ -2249,7 +2247,7 @@
           <a:p>
             <a:pPr lvl="0"/>
             <a:r>
-              <a:rPr lang="en-US" smtClean="0"/>
+              <a:rPr lang="en-US"/>
               <a:t>Click to edit Master text styles</a:t>
             </a:r>
           </a:p>
@@ -2272,7 +2270,7 @@
           <a:p>
             <a:fld id="{5BCAD085-E8A6-8845-BD4E-CB4CCA059FC4}" type="datetimeFigureOut">
               <a:rPr lang="en-US" smtClean="0"/>
-              <a:t>1/27/13</a:t>
+              <a:t>9/15/2026</a:t>
             </a:fld>
             <a:endParaRPr lang="en-US"/>
           </a:p>
@@ -2375,10 +2373,9 @@
           </a:lstStyle>
           <a:p>
             <a:r>
-              <a:rPr lang="en-US" smtClean="0"/>
+              <a:rPr lang="en-US"/>
               <a:t>Click to edit Master title style</a:t>
             </a:r>
-            <a:endParaRPr lang="en-US"/>
           </a:p>
         </p:txBody>
       </p:sp>
@@ -2502,7 +2499,7 @@
           <a:p>
             <a:pPr lvl="0"/>
             <a:r>
-              <a:rPr lang="en-US" smtClean="0"/>
+              <a:rPr lang="en-US"/>
               <a:t>Click to edit Master text styles</a:t>
             </a:r>
           </a:p>
@@ -2525,7 +2522,7 @@
           <a:p>
             <a:fld id="{5BCAD085-E8A6-8845-BD4E-CB4CCA059FC4}" type="datetimeFigureOut">
               <a:rPr lang="en-US" smtClean="0"/>
-              <a:t>1/27/13</a:t>
+              <a:t>9/15/2026</a:t>
             </a:fld>
             <a:endParaRPr lang="en-US"/>
           </a:p>
@@ -2634,10 +2631,9 @@
           <a:lstStyle/>
           <a:p>
             <a:r>
-              <a:rPr lang="en-US" smtClean="0"/>
+              <a:rPr lang="en-US"/>
               <a:t>Click to edit Master title style</a:t>
             </a:r>
-            <a:endParaRPr lang="en-US"/>
           </a:p>
         </p:txBody>
       </p:sp>
@@ -2668,38 +2664,37 @@
           <a:p>
             <a:pPr lvl="0"/>
             <a:r>
-              <a:rPr lang="en-US" smtClean="0"/>
+              <a:rPr lang="en-US"/>
               <a:t>Click to edit Master text styles</a:t>
             </a:r>
           </a:p>
           <a:p>
             <a:pPr lvl="1"/>
             <a:r>
-              <a:rPr lang="en-US" smtClean="0"/>
+              <a:rPr lang="en-US"/>
               <a:t>Second level</a:t>
             </a:r>
           </a:p>
           <a:p>
             <a:pPr lvl="2"/>
             <a:r>
-              <a:rPr lang="en-US" smtClean="0"/>
+              <a:rPr lang="en-US"/>
               <a:t>Third level</a:t>
             </a:r>
           </a:p>
           <a:p>
             <a:pPr lvl="3"/>
             <a:r>
-              <a:rPr lang="en-US" smtClean="0"/>
+              <a:rPr lang="en-US"/>
               <a:t>Fourth level</a:t>
             </a:r>
           </a:p>
           <a:p>
             <a:pPr lvl="4"/>
             <a:r>
-              <a:rPr lang="en-US" smtClean="0"/>
+              <a:rPr lang="en-US"/>
               <a:t>Fifth level</a:t>
             </a:r>
-            <a:endParaRPr lang="en-US"/>
           </a:p>
         </p:txBody>
       </p:sp>
@@ -2738,7 +2733,7 @@
           <a:p>
             <a:fld id="{5BCAD085-E8A6-8845-BD4E-CB4CCA059FC4}" type="datetimeFigureOut">
               <a:rPr lang="en-US" smtClean="0"/>
-              <a:t>1/27/13</a:t>
+              <a:t>9/15/2026</a:t>
             </a:fld>
             <a:endParaRPr lang="en-US"/>
           </a:p>
@@ -3097,7 +3092,7 @@
 </file>
 
 <file path=ppt/slides/slide1.xml><?xml version="1.0" encoding="utf-8"?>
-<p:sld xmlns:a="http://schemas.openxmlformats.org/drawingml/2006/main" xmlns:p="http://schemas.openxmlformats.org/presentationml/2006/main" xmlns:r="http://schemas.openxmlformats.org/officeDocument/2006/relationships">
+<p:sld xmlns:a="http://schemas.openxmlformats.org/drawingml/2006/main" xmlns:r="http://schemas.openxmlformats.org/officeDocument/2006/relationships" xmlns:p="http://schemas.openxmlformats.org/presentationml/2006/main">
   <p:cSld>
     <p:spTree>
       <p:nvGrpSpPr>
@@ -3105,7 +3100,14 @@
         <p:cNvGrpSpPr/>
         <p:nvPr/>
       </p:nvGrpSpPr>
-      <p:grpSpPr/>
+      <p:grpSpPr>
+        <a:xfrm>
+          <a:off x="0" y="0"/>
+          <a:ext cx="0" cy="0"/>
+          <a:chOff x="0" y="0"/>
+          <a:chExt cx="0" cy="0"/>
+        </a:xfrm>
+      </p:grpSpPr>
       <p:sp>
         <p:nvSpPr>
           <p:cNvPr id="2" name="Rectangle 1"/>
@@ -3147,6 +3149,7 @@
           <a:lstStyle/>
           <a:p>
             <a:pPr algn="ctr"/>
+            <a:endParaRPr/>
           </a:p>
         </p:txBody>
       </p:sp>
@@ -3191,6 +3194,7 @@
           <a:lstStyle/>
           <a:p>
             <a:pPr algn="ctr"/>
+            <a:endParaRPr/>
           </a:p>
         </p:txBody>
       </p:sp>
@@ -3211,7 +3215,7 @@
           <a:noFill/>
         </p:spPr>
         <p:txBody>
-          <a:bodyPr wrap="square" lIns="0" rIns="0" tIns="0" bIns="0">
+          <a:bodyPr wrap="square" lIns="0" tIns="0" rIns="0" bIns="0">
             <a:spAutoFit/>
           </a:bodyPr>
           <a:lstStyle/>
@@ -3250,7 +3254,7 @@
           <a:noFill/>
         </p:spPr>
         <p:txBody>
-          <a:bodyPr wrap="square" lIns="0" rIns="0" tIns="0" bIns="0">
+          <a:bodyPr wrap="square" lIns="0" tIns="0" rIns="0" bIns="0">
             <a:spAutoFit/>
           </a:bodyPr>
           <a:lstStyle/>
@@ -3289,7 +3293,7 @@
           <a:noFill/>
         </p:spPr>
         <p:txBody>
-          <a:bodyPr wrap="square" lIns="0" rIns="0" tIns="0" bIns="0">
+          <a:bodyPr wrap="square" lIns="0" tIns="0" rIns="0" bIns="0">
             <a:spAutoFit/>
           </a:bodyPr>
           <a:lstStyle/>
@@ -3328,7 +3332,7 @@
           <a:noFill/>
         </p:spPr>
         <p:txBody>
-          <a:bodyPr wrap="square" lIns="0" rIns="0" tIns="0" bIns="0">
+          <a:bodyPr wrap="square" lIns="0" tIns="0" rIns="0" bIns="0">
             <a:spAutoFit/>
           </a:bodyPr>
           <a:lstStyle/>
@@ -3383,7 +3387,7 @@
           <a:noFill/>
         </p:spPr>
         <p:txBody>
-          <a:bodyPr wrap="square" lIns="0" rIns="0" tIns="0" bIns="0">
+          <a:bodyPr wrap="square" lIns="0" tIns="0" rIns="0" bIns="0">
             <a:spAutoFit/>
           </a:bodyPr>
           <a:lstStyle/>
@@ -3414,7 +3418,7 @@
 </file>
 
 <file path=ppt/slides/slide10.xml><?xml version="1.0" encoding="utf-8"?>
-<p:sld xmlns:a="http://schemas.openxmlformats.org/drawingml/2006/main" xmlns:p="http://schemas.openxmlformats.org/presentationml/2006/main" xmlns:r="http://schemas.openxmlformats.org/officeDocument/2006/relationships">
+<p:sld xmlns:a="http://schemas.openxmlformats.org/drawingml/2006/main" xmlns:r="http://schemas.openxmlformats.org/officeDocument/2006/relationships" xmlns:p="http://schemas.openxmlformats.org/presentationml/2006/main">
   <p:cSld>
     <p:spTree>
       <p:nvGrpSpPr>
@@ -3422,7 +3426,14 @@
         <p:cNvGrpSpPr/>
         <p:nvPr/>
       </p:nvGrpSpPr>
-      <p:grpSpPr/>
+      <p:grpSpPr>
+        <a:xfrm>
+          <a:off x="0" y="0"/>
+          <a:ext cx="0" cy="0"/>
+          <a:chOff x="0" y="0"/>
+          <a:chExt cx="0" cy="0"/>
+        </a:xfrm>
+      </p:grpSpPr>
       <p:sp>
         <p:nvSpPr>
           <p:cNvPr id="2" name="Rectangle 1"/>
@@ -3464,6 +3475,7 @@
           <a:lstStyle/>
           <a:p>
             <a:pPr algn="ctr"/>
+            <a:endParaRPr/>
           </a:p>
         </p:txBody>
       </p:sp>
@@ -3484,7 +3496,7 @@
           <a:noFill/>
         </p:spPr>
         <p:txBody>
-          <a:bodyPr wrap="square" lIns="0" rIns="0" tIns="0" bIns="0">
+          <a:bodyPr wrap="square" lIns="0" tIns="0" rIns="0" bIns="0">
             <a:spAutoFit/>
           </a:bodyPr>
           <a:lstStyle/>
@@ -3523,7 +3535,7 @@
           <a:noFill/>
         </p:spPr>
         <p:txBody>
-          <a:bodyPr wrap="square" lIns="0" rIns="0" tIns="0" bIns="0">
+          <a:bodyPr wrap="square" lIns="0" tIns="0" rIns="0" bIns="0">
             <a:spAutoFit/>
           </a:bodyPr>
           <a:lstStyle/>
@@ -3586,6 +3598,7 @@
           <a:lstStyle/>
           <a:p>
             <a:pPr algn="ctr"/>
+            <a:endParaRPr/>
           </a:p>
         </p:txBody>
       </p:sp>
@@ -3606,7 +3619,7 @@
           <a:noFill/>
         </p:spPr>
         <p:txBody>
-          <a:bodyPr wrap="square" lIns="0" rIns="0" tIns="0" bIns="0">
+          <a:bodyPr wrap="square" lIns="0" tIns="0" rIns="0" bIns="0">
             <a:spAutoFit/>
           </a:bodyPr>
           <a:lstStyle/>
@@ -3669,6 +3682,7 @@
           <a:lstStyle/>
           <a:p>
             <a:pPr algn="ctr"/>
+            <a:endParaRPr/>
           </a:p>
         </p:txBody>
       </p:sp>
@@ -3689,7 +3703,7 @@
           <a:noFill/>
         </p:spPr>
         <p:txBody>
-          <a:bodyPr wrap="square" lIns="0" rIns="0" tIns="0" bIns="0">
+          <a:bodyPr wrap="square" lIns="0" tIns="0" rIns="0" bIns="0">
             <a:spAutoFit/>
           </a:bodyPr>
           <a:lstStyle/>
@@ -3728,7 +3742,7 @@
           <a:noFill/>
         </p:spPr>
         <p:txBody>
-          <a:bodyPr wrap="square" lIns="0" rIns="0" tIns="0" bIns="0">
+          <a:bodyPr wrap="square" lIns="0" tIns="0" rIns="0" bIns="0">
             <a:spAutoFit/>
           </a:bodyPr>
           <a:lstStyle/>
@@ -3767,7 +3781,7 @@
           <a:noFill/>
         </p:spPr>
         <p:txBody>
-          <a:bodyPr wrap="square" lIns="0" rIns="0" tIns="0" bIns="0">
+          <a:bodyPr wrap="square" lIns="0" tIns="0" rIns="0" bIns="0">
             <a:spAutoFit/>
           </a:bodyPr>
           <a:lstStyle/>
@@ -3878,6 +3892,7 @@
           <a:lstStyle/>
           <a:p>
             <a:pPr algn="ctr"/>
+            <a:endParaRPr/>
           </a:p>
         </p:txBody>
       </p:sp>
@@ -3898,7 +3913,7 @@
           <a:noFill/>
         </p:spPr>
         <p:txBody>
-          <a:bodyPr wrap="square" lIns="0" rIns="0" tIns="0" bIns="0">
+          <a:bodyPr wrap="square" lIns="0" tIns="0" rIns="0" bIns="0">
             <a:spAutoFit/>
           </a:bodyPr>
           <a:lstStyle/>
@@ -3937,7 +3952,7 @@
           <a:noFill/>
         </p:spPr>
         <p:txBody>
-          <a:bodyPr wrap="square" lIns="0" rIns="0" tIns="0" bIns="0">
+          <a:bodyPr wrap="square" lIns="0" tIns="0" rIns="0" bIns="0">
             <a:spAutoFit/>
           </a:bodyPr>
           <a:lstStyle/>
@@ -4008,7 +4023,7 @@
           <a:noFill/>
         </p:spPr>
         <p:txBody>
-          <a:bodyPr wrap="square" lIns="0" rIns="0" tIns="0" bIns="0">
+          <a:bodyPr wrap="square" lIns="0" tIns="0" rIns="0" bIns="0">
             <a:spAutoFit/>
           </a:bodyPr>
           <a:lstStyle/>
@@ -4039,7 +4054,7 @@
 </file>
 
 <file path=ppt/slides/slide11.xml><?xml version="1.0" encoding="utf-8"?>
-<p:sld xmlns:a="http://schemas.openxmlformats.org/drawingml/2006/main" xmlns:p="http://schemas.openxmlformats.org/presentationml/2006/main" xmlns:r="http://schemas.openxmlformats.org/officeDocument/2006/relationships">
+<p:sld xmlns:a="http://schemas.openxmlformats.org/drawingml/2006/main" xmlns:r="http://schemas.openxmlformats.org/officeDocument/2006/relationships" xmlns:p="http://schemas.openxmlformats.org/presentationml/2006/main">
   <p:cSld>
     <p:spTree>
       <p:nvGrpSpPr>
@@ -4047,7 +4062,14 @@
         <p:cNvGrpSpPr/>
         <p:nvPr/>
       </p:nvGrpSpPr>
-      <p:grpSpPr/>
+      <p:grpSpPr>
+        <a:xfrm>
+          <a:off x="0" y="0"/>
+          <a:ext cx="0" cy="0"/>
+          <a:chOff x="0" y="0"/>
+          <a:chExt cx="0" cy="0"/>
+        </a:xfrm>
+      </p:grpSpPr>
       <p:sp>
         <p:nvSpPr>
           <p:cNvPr id="2" name="Rectangle 1"/>
@@ -4089,6 +4111,7 @@
           <a:lstStyle/>
           <a:p>
             <a:pPr algn="ctr"/>
+            <a:endParaRPr/>
           </a:p>
         </p:txBody>
       </p:sp>
@@ -4109,7 +4132,7 @@
           <a:noFill/>
         </p:spPr>
         <p:txBody>
-          <a:bodyPr wrap="square" lIns="0" rIns="0" tIns="0" bIns="0">
+          <a:bodyPr wrap="square" lIns="0" tIns="0" rIns="0" bIns="0">
             <a:spAutoFit/>
           </a:bodyPr>
           <a:lstStyle/>
@@ -4148,7 +4171,7 @@
           <a:noFill/>
         </p:spPr>
         <p:txBody>
-          <a:bodyPr wrap="square" lIns="0" rIns="0" tIns="0" bIns="0">
+          <a:bodyPr wrap="square" lIns="0" tIns="0" rIns="0" bIns="0">
             <a:spAutoFit/>
           </a:bodyPr>
           <a:lstStyle/>
@@ -4211,6 +4234,7 @@
           <a:lstStyle/>
           <a:p>
             <a:pPr algn="ctr"/>
+            <a:endParaRPr/>
           </a:p>
         </p:txBody>
       </p:sp>
@@ -4231,7 +4255,7 @@
           <a:noFill/>
         </p:spPr>
         <p:txBody>
-          <a:bodyPr wrap="square" lIns="0" rIns="0" tIns="0" bIns="0">
+          <a:bodyPr wrap="square" lIns="0" tIns="0" rIns="0" bIns="0">
             <a:spAutoFit/>
           </a:bodyPr>
           <a:lstStyle/>
@@ -4270,7 +4294,7 @@
           <a:noFill/>
         </p:spPr>
         <p:txBody>
-          <a:bodyPr wrap="square" lIns="0" rIns="0" tIns="0" bIns="0">
+          <a:bodyPr wrap="square" lIns="0" tIns="0" rIns="0" bIns="0">
             <a:spAutoFit/>
           </a:bodyPr>
           <a:lstStyle/>
@@ -4333,6 +4357,7 @@
           <a:lstStyle/>
           <a:p>
             <a:pPr algn="ctr"/>
+            <a:endParaRPr/>
           </a:p>
         </p:txBody>
       </p:sp>
@@ -4353,7 +4378,7 @@
           <a:noFill/>
         </p:spPr>
         <p:txBody>
-          <a:bodyPr wrap="square" lIns="0" rIns="0" tIns="0" bIns="0">
+          <a:bodyPr wrap="square" lIns="0" tIns="0" rIns="0" bIns="0">
             <a:spAutoFit/>
           </a:bodyPr>
           <a:lstStyle/>
@@ -4392,7 +4417,7 @@
           <a:noFill/>
         </p:spPr>
         <p:txBody>
-          <a:bodyPr wrap="square" lIns="0" rIns="0" tIns="0" bIns="0">
+          <a:bodyPr wrap="square" lIns="0" tIns="0" rIns="0" bIns="0">
             <a:spAutoFit/>
           </a:bodyPr>
           <a:lstStyle/>
@@ -4455,6 +4480,7 @@
           <a:lstStyle/>
           <a:p>
             <a:pPr algn="ctr"/>
+            <a:endParaRPr/>
           </a:p>
         </p:txBody>
       </p:sp>
@@ -4475,7 +4501,7 @@
           <a:noFill/>
         </p:spPr>
         <p:txBody>
-          <a:bodyPr wrap="square" lIns="0" rIns="0" tIns="0" bIns="0">
+          <a:bodyPr wrap="square" lIns="0" tIns="0" rIns="0" bIns="0">
             <a:spAutoFit/>
           </a:bodyPr>
           <a:lstStyle/>
@@ -4514,7 +4540,7 @@
           <a:noFill/>
         </p:spPr>
         <p:txBody>
-          <a:bodyPr wrap="square" lIns="0" rIns="0" tIns="0" bIns="0">
+          <a:bodyPr wrap="square" lIns="0" tIns="0" rIns="0" bIns="0">
             <a:spAutoFit/>
           </a:bodyPr>
           <a:lstStyle/>
@@ -4553,7 +4579,7 @@
           <a:noFill/>
         </p:spPr>
         <p:txBody>
-          <a:bodyPr wrap="square" lIns="0" rIns="0" tIns="0" bIns="0">
+          <a:bodyPr wrap="square" lIns="0" tIns="0" rIns="0" bIns="0">
             <a:spAutoFit/>
           </a:bodyPr>
           <a:lstStyle/>
@@ -4616,6 +4642,7 @@
           <a:lstStyle/>
           <a:p>
             <a:pPr algn="ctr"/>
+            <a:endParaRPr/>
           </a:p>
         </p:txBody>
       </p:sp>
@@ -4636,7 +4663,7 @@
           <a:noFill/>
         </p:spPr>
         <p:txBody>
-          <a:bodyPr wrap="square" lIns="0" rIns="0" tIns="0" bIns="0">
+          <a:bodyPr wrap="square" lIns="0" tIns="0" rIns="0" bIns="0">
             <a:spAutoFit/>
           </a:bodyPr>
           <a:lstStyle/>
@@ -4675,7 +4702,7 @@
           <a:noFill/>
         </p:spPr>
         <p:txBody>
-          <a:bodyPr wrap="square" lIns="0" rIns="0" tIns="0" bIns="0">
+          <a:bodyPr wrap="square" lIns="0" tIns="0" rIns="0" bIns="0">
             <a:spAutoFit/>
           </a:bodyPr>
           <a:lstStyle/>
@@ -4714,7 +4741,7 @@
           <a:noFill/>
         </p:spPr>
         <p:txBody>
-          <a:bodyPr wrap="square" lIns="0" rIns="0" tIns="0" bIns="0">
+          <a:bodyPr wrap="square" lIns="0" tIns="0" rIns="0" bIns="0">
             <a:spAutoFit/>
           </a:bodyPr>
           <a:lstStyle/>
@@ -4753,7 +4780,7 @@
           <a:noFill/>
         </p:spPr>
         <p:txBody>
-          <a:bodyPr wrap="square" lIns="0" rIns="0" tIns="0" bIns="0">
+          <a:bodyPr wrap="square" lIns="0" tIns="0" rIns="0" bIns="0">
             <a:spAutoFit/>
           </a:bodyPr>
           <a:lstStyle/>
@@ -4793,7 +4820,7 @@
 </file>
 
 <file path=ppt/slides/slide12.xml><?xml version="1.0" encoding="utf-8"?>
-<p:sld xmlns:a="http://schemas.openxmlformats.org/drawingml/2006/main" xmlns:p="http://schemas.openxmlformats.org/presentationml/2006/main" xmlns:r="http://schemas.openxmlformats.org/officeDocument/2006/relationships">
+<p:sld xmlns:a="http://schemas.openxmlformats.org/drawingml/2006/main" xmlns:r="http://schemas.openxmlformats.org/officeDocument/2006/relationships" xmlns:p="http://schemas.openxmlformats.org/presentationml/2006/main">
   <p:cSld>
     <p:spTree>
       <p:nvGrpSpPr>
@@ -4801,7 +4828,14 @@
         <p:cNvGrpSpPr/>
         <p:nvPr/>
       </p:nvGrpSpPr>
-      <p:grpSpPr/>
+      <p:grpSpPr>
+        <a:xfrm>
+          <a:off x="0" y="0"/>
+          <a:ext cx="0" cy="0"/>
+          <a:chOff x="0" y="0"/>
+          <a:chExt cx="0" cy="0"/>
+        </a:xfrm>
+      </p:grpSpPr>
       <p:sp>
         <p:nvSpPr>
           <p:cNvPr id="2" name="Rectangle 1"/>
@@ -4843,6 +4877,7 @@
           <a:lstStyle/>
           <a:p>
             <a:pPr algn="ctr"/>
+            <a:endParaRPr/>
           </a:p>
         </p:txBody>
       </p:sp>
@@ -4863,7 +4898,7 @@
           <a:noFill/>
         </p:spPr>
         <p:txBody>
-          <a:bodyPr wrap="square" lIns="0" rIns="0" tIns="0" bIns="0">
+          <a:bodyPr wrap="square" lIns="0" tIns="0" rIns="0" bIns="0">
             <a:spAutoFit/>
           </a:bodyPr>
           <a:lstStyle/>
@@ -4902,7 +4937,7 @@
           <a:noFill/>
         </p:spPr>
         <p:txBody>
-          <a:bodyPr wrap="square" lIns="0" rIns="0" tIns="0" bIns="0">
+          <a:bodyPr wrap="square" lIns="0" tIns="0" rIns="0" bIns="0">
             <a:spAutoFit/>
           </a:bodyPr>
           <a:lstStyle/>
@@ -4941,7 +4976,7 @@
           <a:noFill/>
         </p:spPr>
         <p:txBody>
-          <a:bodyPr wrap="square" lIns="0" rIns="0" tIns="0" bIns="0">
+          <a:bodyPr wrap="square" lIns="0" tIns="0" rIns="0" bIns="0">
             <a:spAutoFit/>
           </a:bodyPr>
           <a:lstStyle/>
@@ -4980,7 +5015,7 @@
           <a:noFill/>
         </p:spPr>
         <p:txBody>
-          <a:bodyPr wrap="square" lIns="0" rIns="0" tIns="0" bIns="0">
+          <a:bodyPr wrap="square" lIns="0" tIns="0" rIns="0" bIns="0">
             <a:spAutoFit/>
           </a:bodyPr>
           <a:lstStyle/>
@@ -5043,6 +5078,7 @@
           <a:lstStyle/>
           <a:p>
             <a:pPr algn="ctr"/>
+            <a:endParaRPr/>
           </a:p>
         </p:txBody>
       </p:sp>
@@ -5063,7 +5099,7 @@
           <a:noFill/>
         </p:spPr>
         <p:txBody>
-          <a:bodyPr wrap="square" lIns="0" rIns="0" tIns="0" bIns="0">
+          <a:bodyPr wrap="square" lIns="0" tIns="0" rIns="0" bIns="0">
             <a:spAutoFit/>
           </a:bodyPr>
           <a:lstStyle/>
@@ -5102,7 +5138,7 @@
           <a:noFill/>
         </p:spPr>
         <p:txBody>
-          <a:bodyPr wrap="square" lIns="0" rIns="0" tIns="0" bIns="0">
+          <a:bodyPr wrap="square" lIns="0" tIns="0" rIns="0" bIns="0">
             <a:spAutoFit/>
           </a:bodyPr>
           <a:lstStyle/>
@@ -5119,16 +5155,7 @@
                 </a:solidFill>
                 <a:latin typeface="Segoe UI"/>
               </a:rPr>
-              <a:t>Position Sarsabz as  </a:t>
-            </a:r>
-            <a:r>
-              <a:rPr sz="1900" b="1" i="0">
-                <a:solidFill>
-                  <a:srgbClr val="C8102E"/>
-                </a:solidFill>
-                <a:latin typeface="Segoe UI"/>
-              </a:rPr>
-              <a:t>THE CHAMPION WHO GAVE THE FARMER HIS DAY, AND NOW GIVES HIM HIS VOICE.</a:t>
+              <a:t>Position Sarsabz as  THE CHAMPION WHO GAVE THE FARMER HIS DAY, AND NOW GIVES HIM HIS VOICE.</a:t>
             </a:r>
           </a:p>
         </p:txBody>
@@ -5150,7 +5177,7 @@
           <a:noFill/>
         </p:spPr>
         <p:txBody>
-          <a:bodyPr wrap="square" lIns="0" rIns="0" tIns="0" bIns="0">
+          <a:bodyPr wrap="square" lIns="0" tIns="0" rIns="0" bIns="0">
             <a:spAutoFit/>
           </a:bodyPr>
           <a:lstStyle/>
@@ -5189,7 +5216,7 @@
           <a:noFill/>
         </p:spPr>
         <p:txBody>
-          <a:bodyPr wrap="square" lIns="0" rIns="0" tIns="0" bIns="0">
+          <a:bodyPr wrap="square" lIns="0" tIns="0" rIns="0" bIns="0">
             <a:spAutoFit/>
           </a:bodyPr>
           <a:lstStyle/>
@@ -5311,6 +5338,7 @@
           <a:lstStyle/>
           <a:p>
             <a:pPr algn="ctr"/>
+            <a:endParaRPr/>
           </a:p>
         </p:txBody>
       </p:sp>
@@ -5331,7 +5359,7 @@
           <a:noFill/>
         </p:spPr>
         <p:txBody>
-          <a:bodyPr wrap="square" lIns="0" rIns="0" tIns="0" bIns="0">
+          <a:bodyPr wrap="square" lIns="0" tIns="0" rIns="0" bIns="0">
             <a:spAutoFit/>
           </a:bodyPr>
           <a:lstStyle/>
@@ -5370,7 +5398,7 @@
           <a:noFill/>
         </p:spPr>
         <p:txBody>
-          <a:bodyPr wrap="square" lIns="0" rIns="0" tIns="0" bIns="0">
+          <a:bodyPr wrap="square" lIns="0" tIns="0" rIns="0" bIns="0">
             <a:spAutoFit/>
           </a:bodyPr>
           <a:lstStyle/>
@@ -5485,7 +5513,7 @@
 </file>
 
 <file path=ppt/slides/slide13.xml><?xml version="1.0" encoding="utf-8"?>
-<p:sld xmlns:a="http://schemas.openxmlformats.org/drawingml/2006/main" xmlns:p="http://schemas.openxmlformats.org/presentationml/2006/main" xmlns:r="http://schemas.openxmlformats.org/officeDocument/2006/relationships">
+<p:sld xmlns:a="http://schemas.openxmlformats.org/drawingml/2006/main" xmlns:r="http://schemas.openxmlformats.org/officeDocument/2006/relationships" xmlns:p="http://schemas.openxmlformats.org/presentationml/2006/main">
   <p:cSld>
     <p:spTree>
       <p:nvGrpSpPr>
@@ -5493,7 +5521,14 @@
         <p:cNvGrpSpPr/>
         <p:nvPr/>
       </p:nvGrpSpPr>
-      <p:grpSpPr/>
+      <p:grpSpPr>
+        <a:xfrm>
+          <a:off x="0" y="0"/>
+          <a:ext cx="0" cy="0"/>
+          <a:chOff x="0" y="0"/>
+          <a:chExt cx="0" cy="0"/>
+        </a:xfrm>
+      </p:grpSpPr>
       <p:sp>
         <p:nvSpPr>
           <p:cNvPr id="2" name="Rectangle 1"/>
@@ -5535,6 +5570,7 @@
           <a:lstStyle/>
           <a:p>
             <a:pPr algn="ctr"/>
+            <a:endParaRPr/>
           </a:p>
         </p:txBody>
       </p:sp>
@@ -5555,7 +5591,7 @@
           <a:noFill/>
         </p:spPr>
         <p:txBody>
-          <a:bodyPr wrap="square" lIns="0" rIns="0" tIns="0" bIns="0">
+          <a:bodyPr wrap="square" lIns="0" tIns="0" rIns="0" bIns="0">
             <a:spAutoFit/>
           </a:bodyPr>
           <a:lstStyle/>
@@ -5594,7 +5630,7 @@
           <a:noFill/>
         </p:spPr>
         <p:txBody>
-          <a:bodyPr wrap="square" lIns="0" rIns="0" tIns="0" bIns="0">
+          <a:bodyPr wrap="square" lIns="0" tIns="0" rIns="0" bIns="0">
             <a:spAutoFit/>
           </a:bodyPr>
           <a:lstStyle/>
@@ -5633,7 +5669,7 @@
           <a:noFill/>
         </p:spPr>
         <p:txBody>
-          <a:bodyPr wrap="square" lIns="0" rIns="0" tIns="0" bIns="0">
+          <a:bodyPr wrap="square" lIns="0" tIns="0" rIns="0" bIns="0">
             <a:spAutoFit/>
           </a:bodyPr>
           <a:lstStyle/>
@@ -5696,6 +5732,7 @@
           <a:lstStyle/>
           <a:p>
             <a:pPr algn="ctr"/>
+            <a:endParaRPr/>
           </a:p>
         </p:txBody>
       </p:sp>
@@ -5716,7 +5753,7 @@
           <a:noFill/>
         </p:spPr>
         <p:txBody>
-          <a:bodyPr wrap="square" lIns="0" rIns="0" tIns="0" bIns="0">
+          <a:bodyPr wrap="square" lIns="0" tIns="0" rIns="0" bIns="0">
             <a:spAutoFit/>
           </a:bodyPr>
           <a:lstStyle/>
@@ -5755,7 +5792,7 @@
           <a:noFill/>
         </p:spPr>
         <p:txBody>
-          <a:bodyPr wrap="square" lIns="0" rIns="0" tIns="0" bIns="0">
+          <a:bodyPr wrap="square" lIns="0" tIns="0" rIns="0" bIns="0">
             <a:spAutoFit/>
           </a:bodyPr>
           <a:lstStyle/>
@@ -5818,6 +5855,7 @@
           <a:lstStyle/>
           <a:p>
             <a:pPr algn="ctr"/>
+            <a:endParaRPr/>
           </a:p>
         </p:txBody>
       </p:sp>
@@ -5838,7 +5876,7 @@
           <a:noFill/>
         </p:spPr>
         <p:txBody>
-          <a:bodyPr wrap="square" lIns="0" rIns="0" tIns="0" bIns="0">
+          <a:bodyPr wrap="square" lIns="0" tIns="0" rIns="0" bIns="0">
             <a:spAutoFit/>
           </a:bodyPr>
           <a:lstStyle/>
@@ -5877,7 +5915,7 @@
           <a:noFill/>
         </p:spPr>
         <p:txBody>
-          <a:bodyPr wrap="square" lIns="0" rIns="0" tIns="0" bIns="0">
+          <a:bodyPr wrap="square" lIns="0" tIns="0" rIns="0" bIns="0">
             <a:spAutoFit/>
           </a:bodyPr>
           <a:lstStyle/>
@@ -5940,6 +5978,7 @@
           <a:lstStyle/>
           <a:p>
             <a:pPr algn="ctr"/>
+            <a:endParaRPr/>
           </a:p>
         </p:txBody>
       </p:sp>
@@ -5960,7 +5999,7 @@
           <a:noFill/>
         </p:spPr>
         <p:txBody>
-          <a:bodyPr wrap="square" lIns="0" rIns="0" tIns="0" bIns="0">
+          <a:bodyPr wrap="square" lIns="0" tIns="0" rIns="0" bIns="0">
             <a:spAutoFit/>
           </a:bodyPr>
           <a:lstStyle/>
@@ -5999,7 +6038,7 @@
           <a:noFill/>
         </p:spPr>
         <p:txBody>
-          <a:bodyPr wrap="square" lIns="0" rIns="0" tIns="0" bIns="0">
+          <a:bodyPr wrap="square" lIns="0" tIns="0" rIns="0" bIns="0">
             <a:spAutoFit/>
           </a:bodyPr>
           <a:lstStyle/>
@@ -6062,6 +6101,7 @@
           <a:lstStyle/>
           <a:p>
             <a:pPr algn="ctr"/>
+            <a:endParaRPr/>
           </a:p>
         </p:txBody>
       </p:sp>
@@ -6082,7 +6122,7 @@
           <a:noFill/>
         </p:spPr>
         <p:txBody>
-          <a:bodyPr wrap="square" lIns="0" rIns="0" tIns="0" bIns="0">
+          <a:bodyPr wrap="square" lIns="0" tIns="0" rIns="0" bIns="0">
             <a:spAutoFit/>
           </a:bodyPr>
           <a:lstStyle/>
@@ -6121,7 +6161,7 @@
           <a:noFill/>
         </p:spPr>
         <p:txBody>
-          <a:bodyPr wrap="square" lIns="0" rIns="0" tIns="0" bIns="0">
+          <a:bodyPr wrap="square" lIns="0" tIns="0" rIns="0" bIns="0">
             <a:spAutoFit/>
           </a:bodyPr>
           <a:lstStyle/>
@@ -6184,6 +6224,7 @@
           <a:lstStyle/>
           <a:p>
             <a:pPr algn="ctr"/>
+            <a:endParaRPr/>
           </a:p>
         </p:txBody>
       </p:sp>
@@ -6204,7 +6245,7 @@
           <a:noFill/>
         </p:spPr>
         <p:txBody>
-          <a:bodyPr wrap="square" lIns="0" rIns="0" tIns="0" bIns="0">
+          <a:bodyPr wrap="square" lIns="0" tIns="0" rIns="0" bIns="0">
             <a:spAutoFit/>
           </a:bodyPr>
           <a:lstStyle/>
@@ -6243,7 +6284,7 @@
           <a:noFill/>
         </p:spPr>
         <p:txBody>
-          <a:bodyPr wrap="square" lIns="0" rIns="0" tIns="0" bIns="0">
+          <a:bodyPr wrap="square" lIns="0" tIns="0" rIns="0" bIns="0">
             <a:spAutoFit/>
           </a:bodyPr>
           <a:lstStyle/>
@@ -6282,7 +6323,7 @@
           <a:noFill/>
         </p:spPr>
         <p:txBody>
-          <a:bodyPr wrap="square" lIns="0" rIns="0" tIns="0" bIns="0">
+          <a:bodyPr wrap="square" lIns="0" tIns="0" rIns="0" bIns="0">
             <a:spAutoFit/>
           </a:bodyPr>
           <a:lstStyle/>
@@ -6321,7 +6362,7 @@
           <a:noFill/>
         </p:spPr>
         <p:txBody>
-          <a:bodyPr wrap="square" lIns="0" rIns="0" tIns="0" bIns="0">
+          <a:bodyPr wrap="square" lIns="0" tIns="0" rIns="0" bIns="0">
             <a:spAutoFit/>
           </a:bodyPr>
           <a:lstStyle/>
@@ -6360,7 +6401,7 @@
           <a:noFill/>
         </p:spPr>
         <p:txBody>
-          <a:bodyPr wrap="square" lIns="0" rIns="0" tIns="0" bIns="0">
+          <a:bodyPr wrap="square" lIns="0" tIns="0" rIns="0" bIns="0">
             <a:spAutoFit/>
           </a:bodyPr>
           <a:lstStyle/>
@@ -6507,6 +6548,7 @@
           <a:lstStyle/>
           <a:p>
             <a:pPr algn="ctr"/>
+            <a:endParaRPr/>
           </a:p>
         </p:txBody>
       </p:sp>
@@ -6527,7 +6569,7 @@
           <a:noFill/>
         </p:spPr>
         <p:txBody>
-          <a:bodyPr wrap="square" lIns="0" rIns="0" tIns="0" bIns="0">
+          <a:bodyPr wrap="square" lIns="0" tIns="0" rIns="0" bIns="0">
             <a:spAutoFit/>
           </a:bodyPr>
           <a:lstStyle/>
@@ -6558,7 +6600,7 @@
 </file>
 
 <file path=ppt/slides/slide14.xml><?xml version="1.0" encoding="utf-8"?>
-<p:sld xmlns:a="http://schemas.openxmlformats.org/drawingml/2006/main" xmlns:p="http://schemas.openxmlformats.org/presentationml/2006/main" xmlns:r="http://schemas.openxmlformats.org/officeDocument/2006/relationships">
+<p:sld xmlns:a="http://schemas.openxmlformats.org/drawingml/2006/main" xmlns:r="http://schemas.openxmlformats.org/officeDocument/2006/relationships" xmlns:p="http://schemas.openxmlformats.org/presentationml/2006/main">
   <p:cSld>
     <p:spTree>
       <p:nvGrpSpPr>
@@ -6566,7 +6608,14 @@
         <p:cNvGrpSpPr/>
         <p:nvPr/>
       </p:nvGrpSpPr>
-      <p:grpSpPr/>
+      <p:grpSpPr>
+        <a:xfrm>
+          <a:off x="0" y="0"/>
+          <a:ext cx="0" cy="0"/>
+          <a:chOff x="0" y="0"/>
+          <a:chExt cx="0" cy="0"/>
+        </a:xfrm>
+      </p:grpSpPr>
       <p:sp>
         <p:nvSpPr>
           <p:cNvPr id="2" name="Rectangle 1"/>
@@ -6608,6 +6657,7 @@
           <a:lstStyle/>
           <a:p>
             <a:pPr algn="ctr"/>
+            <a:endParaRPr/>
           </a:p>
         </p:txBody>
       </p:sp>
@@ -6652,6 +6702,7 @@
           <a:lstStyle/>
           <a:p>
             <a:pPr algn="ctr"/>
+            <a:endParaRPr/>
           </a:p>
         </p:txBody>
       </p:sp>
@@ -6672,7 +6723,7 @@
           <a:noFill/>
         </p:spPr>
         <p:txBody>
-          <a:bodyPr wrap="square" lIns="0" rIns="0" tIns="0" bIns="0">
+          <a:bodyPr wrap="square" lIns="0" tIns="0" rIns="0" bIns="0">
             <a:spAutoFit/>
           </a:bodyPr>
           <a:lstStyle/>
@@ -6703,48 +6754,66 @@
         <p:spPr>
           <a:xfrm>
             <a:off x="822960" y="2697480"/>
-            <a:ext cx="10607040" cy="1645920"/>
-          </a:xfrm>
-          <a:prstGeom prst="rect">
-            <a:avLst/>
-          </a:prstGeom>
-          <a:noFill/>
-        </p:spPr>
-        <p:txBody>
-          <a:bodyPr wrap="square" lIns="0" rIns="0" tIns="0" bIns="0">
-            <a:spAutoFit/>
-          </a:bodyPr>
-          <a:lstStyle/>
-          <a:p>
-            <a:pPr algn="l">
-              <a:spcAft>
-                <a:spcPts val="0"/>
-              </a:spcAft>
-            </a:pPr>
-            <a:r>
-              <a:rPr sz="4400" b="1" i="0">
+            <a:ext cx="10607040" cy="1354217"/>
+          </a:xfrm>
+          <a:prstGeom prst="rect">
+            <a:avLst/>
+          </a:prstGeom>
+          <a:noFill/>
+        </p:spPr>
+        <p:txBody>
+          <a:bodyPr wrap="square" lIns="0" tIns="0" rIns="0" bIns="0">
+            <a:spAutoFit/>
+          </a:bodyPr>
+          <a:lstStyle/>
+          <a:p>
+            <a:pPr algn="l">
+              <a:spcAft>
+                <a:spcPts val="0"/>
+              </a:spcAft>
+            </a:pPr>
+            <a:r>
+              <a:rPr sz="4400" b="1" i="0" dirty="0">
                 <a:solidFill>
                   <a:srgbClr val="FFFFFF"/>
                 </a:solidFill>
                 <a:latin typeface="Segoe UI"/>
               </a:rPr>
-              <a:t>Salam Kissan.</a:t>
-            </a:r>
-          </a:p>
-          <a:p>
-            <a:pPr algn="l">
-              <a:spcAft>
-                <a:spcPts val="0"/>
-              </a:spcAft>
-            </a:pPr>
-            <a:r>
-              <a:rPr sz="4400" b="1" i="0">
+              <a:t>Salam </a:t>
+            </a:r>
+            <a:r>
+              <a:rPr sz="4400" b="1" i="0" dirty="0" err="1">
                 <a:solidFill>
                   <a:srgbClr val="FFFFFF"/>
                 </a:solidFill>
                 <a:latin typeface="Segoe UI"/>
               </a:rPr>
-              <a:t>Wa Alaikum Salam, Pakistan.</a:t>
+              <a:t>Kissan</a:t>
+            </a:r>
+            <a:r>
+              <a:rPr sz="4400" b="1" i="0" dirty="0">
+                <a:solidFill>
+                  <a:srgbClr val="FFFFFF"/>
+                </a:solidFill>
+                <a:latin typeface="Segoe UI"/>
+              </a:rPr>
+              <a:t>.</a:t>
+            </a:r>
+          </a:p>
+          <a:p>
+            <a:pPr algn="l">
+              <a:spcAft>
+                <a:spcPts val="0"/>
+              </a:spcAft>
+            </a:pPr>
+            <a:r>
+              <a:rPr sz="4400" b="1" i="0" dirty="0">
+                <a:solidFill>
+                  <a:srgbClr val="FFFFFF"/>
+                </a:solidFill>
+                <a:latin typeface="Segoe UI"/>
+              </a:rPr>
+              <a:t>Salam, Pakistan.</a:t>
             </a:r>
           </a:p>
         </p:txBody>
@@ -6766,7 +6835,7 @@
           <a:noFill/>
         </p:spPr>
         <p:txBody>
-          <a:bodyPr wrap="square" lIns="0" rIns="0" tIns="0" bIns="0">
+          <a:bodyPr wrap="square" lIns="0" tIns="0" rIns="0" bIns="0">
             <a:spAutoFit/>
           </a:bodyPr>
           <a:lstStyle/>
@@ -6805,7 +6874,7 @@
           <a:noFill/>
         </p:spPr>
         <p:txBody>
-          <a:bodyPr wrap="square" lIns="0" rIns="0" tIns="0" bIns="0">
+          <a:bodyPr wrap="square" lIns="0" tIns="0" rIns="0" bIns="0">
             <a:spAutoFit/>
           </a:bodyPr>
           <a:lstStyle/>
@@ -6836,7 +6905,7 @@
 </file>
 
 <file path=ppt/slides/slide15.xml><?xml version="1.0" encoding="utf-8"?>
-<p:sld xmlns:a="http://schemas.openxmlformats.org/drawingml/2006/main" xmlns:p="http://schemas.openxmlformats.org/presentationml/2006/main" xmlns:r="http://schemas.openxmlformats.org/officeDocument/2006/relationships">
+<p:sld xmlns:a="http://schemas.openxmlformats.org/drawingml/2006/main" xmlns:r="http://schemas.openxmlformats.org/officeDocument/2006/relationships" xmlns:p="http://schemas.openxmlformats.org/presentationml/2006/main">
   <p:cSld>
     <p:spTree>
       <p:nvGrpSpPr>
@@ -6844,7 +6913,14 @@
         <p:cNvGrpSpPr/>
         <p:nvPr/>
       </p:nvGrpSpPr>
-      <p:grpSpPr/>
+      <p:grpSpPr>
+        <a:xfrm>
+          <a:off x="0" y="0"/>
+          <a:ext cx="0" cy="0"/>
+          <a:chOff x="0" y="0"/>
+          <a:chExt cx="0" cy="0"/>
+        </a:xfrm>
+      </p:grpSpPr>
       <p:sp>
         <p:nvSpPr>
           <p:cNvPr id="2" name="Rectangle 1"/>
@@ -6886,6 +6962,7 @@
           <a:lstStyle/>
           <a:p>
             <a:pPr algn="ctr"/>
+            <a:endParaRPr/>
           </a:p>
         </p:txBody>
       </p:sp>
@@ -6906,7 +6983,7 @@
           <a:noFill/>
         </p:spPr>
         <p:txBody>
-          <a:bodyPr wrap="square" lIns="0" rIns="0" tIns="0" bIns="0">
+          <a:bodyPr wrap="square" lIns="0" tIns="0" rIns="0" bIns="0">
             <a:spAutoFit/>
           </a:bodyPr>
           <a:lstStyle/>
@@ -6945,7 +7022,7 @@
           <a:noFill/>
         </p:spPr>
         <p:txBody>
-          <a:bodyPr wrap="square" lIns="0" rIns="0" tIns="0" bIns="0">
+          <a:bodyPr wrap="square" lIns="0" tIns="0" rIns="0" bIns="0">
             <a:spAutoFit/>
           </a:bodyPr>
           <a:lstStyle/>
@@ -7008,6 +7085,7 @@
           <a:lstStyle/>
           <a:p>
             <a:pPr algn="ctr"/>
+            <a:endParaRPr/>
           </a:p>
         </p:txBody>
       </p:sp>
@@ -7028,7 +7106,7 @@
           <a:noFill/>
         </p:spPr>
         <p:txBody>
-          <a:bodyPr wrap="square" lIns="0" rIns="0" tIns="0" bIns="0">
+          <a:bodyPr wrap="square" lIns="0" tIns="0" rIns="0" bIns="0">
             <a:spAutoFit/>
           </a:bodyPr>
           <a:lstStyle/>
@@ -7067,7 +7145,7 @@
           <a:noFill/>
         </p:spPr>
         <p:txBody>
-          <a:bodyPr wrap="square" lIns="0" rIns="0" tIns="0" bIns="0">
+          <a:bodyPr wrap="square" lIns="0" tIns="0" rIns="0" bIns="0">
             <a:spAutoFit/>
           </a:bodyPr>
           <a:lstStyle/>
@@ -7130,6 +7208,7 @@
           <a:lstStyle/>
           <a:p>
             <a:pPr algn="ctr"/>
+            <a:endParaRPr/>
           </a:p>
         </p:txBody>
       </p:sp>
@@ -7150,7 +7229,7 @@
           <a:noFill/>
         </p:spPr>
         <p:txBody>
-          <a:bodyPr wrap="square" lIns="0" rIns="0" tIns="0" bIns="0">
+          <a:bodyPr wrap="square" lIns="0" tIns="0" rIns="0" bIns="0">
             <a:spAutoFit/>
           </a:bodyPr>
           <a:lstStyle/>
@@ -7189,7 +7268,7 @@
           <a:noFill/>
         </p:spPr>
         <p:txBody>
-          <a:bodyPr wrap="square" lIns="0" rIns="0" tIns="0" bIns="0">
+          <a:bodyPr wrap="square" lIns="0" tIns="0" rIns="0" bIns="0">
             <a:spAutoFit/>
           </a:bodyPr>
           <a:lstStyle/>
@@ -7252,6 +7331,7 @@
           <a:lstStyle/>
           <a:p>
             <a:pPr algn="ctr"/>
+            <a:endParaRPr/>
           </a:p>
         </p:txBody>
       </p:sp>
@@ -7272,7 +7352,7 @@
           <a:noFill/>
         </p:spPr>
         <p:txBody>
-          <a:bodyPr wrap="square" lIns="0" rIns="0" tIns="0" bIns="0">
+          <a:bodyPr wrap="square" lIns="0" tIns="0" rIns="0" bIns="0">
             <a:spAutoFit/>
           </a:bodyPr>
           <a:lstStyle/>
@@ -7311,7 +7391,7 @@
           <a:noFill/>
         </p:spPr>
         <p:txBody>
-          <a:bodyPr wrap="square" lIns="0" rIns="0" tIns="0" bIns="0">
+          <a:bodyPr wrap="square" lIns="0" tIns="0" rIns="0" bIns="0">
             <a:spAutoFit/>
           </a:bodyPr>
           <a:lstStyle/>
@@ -7374,6 +7454,7 @@
           <a:lstStyle/>
           <a:p>
             <a:pPr algn="ctr"/>
+            <a:endParaRPr/>
           </a:p>
         </p:txBody>
       </p:sp>
@@ -7394,7 +7475,7 @@
           <a:noFill/>
         </p:spPr>
         <p:txBody>
-          <a:bodyPr wrap="square" lIns="0" rIns="0" tIns="0" bIns="0">
+          <a:bodyPr wrap="square" lIns="0" tIns="0" rIns="0" bIns="0">
             <a:spAutoFit/>
           </a:bodyPr>
           <a:lstStyle/>
@@ -7433,7 +7514,7 @@
           <a:noFill/>
         </p:spPr>
         <p:txBody>
-          <a:bodyPr wrap="square" lIns="0" rIns="0" tIns="0" bIns="0">
+          <a:bodyPr wrap="square" lIns="0" tIns="0" rIns="0" bIns="0">
             <a:spAutoFit/>
           </a:bodyPr>
           <a:lstStyle/>
@@ -7496,6 +7577,7 @@
           <a:lstStyle/>
           <a:p>
             <a:pPr algn="ctr"/>
+            <a:endParaRPr/>
           </a:p>
         </p:txBody>
       </p:sp>
@@ -7516,7 +7598,7 @@
           <a:noFill/>
         </p:spPr>
         <p:txBody>
-          <a:bodyPr wrap="square" lIns="0" rIns="0" tIns="0" bIns="0">
+          <a:bodyPr wrap="square" lIns="0" tIns="0" rIns="0" bIns="0">
             <a:spAutoFit/>
           </a:bodyPr>
           <a:lstStyle/>
@@ -7555,7 +7637,7 @@
           <a:noFill/>
         </p:spPr>
         <p:txBody>
-          <a:bodyPr wrap="square" lIns="0" rIns="0" tIns="0" bIns="0">
+          <a:bodyPr wrap="square" lIns="0" tIns="0" rIns="0" bIns="0">
             <a:spAutoFit/>
           </a:bodyPr>
           <a:lstStyle/>
@@ -7618,6 +7700,7 @@
           <a:lstStyle/>
           <a:p>
             <a:pPr algn="ctr"/>
+            <a:endParaRPr/>
           </a:p>
         </p:txBody>
       </p:sp>
@@ -7662,6 +7745,7 @@
           <a:lstStyle/>
           <a:p>
             <a:pPr algn="ctr"/>
+            <a:endParaRPr/>
           </a:p>
         </p:txBody>
       </p:sp>
@@ -7682,7 +7766,7 @@
           <a:noFill/>
         </p:spPr>
         <p:txBody>
-          <a:bodyPr wrap="square" lIns="0" rIns="0" tIns="0" bIns="0">
+          <a:bodyPr wrap="square" lIns="0" tIns="0" rIns="0" bIns="0">
             <a:spAutoFit/>
           </a:bodyPr>
           <a:lstStyle/>
@@ -7713,32 +7797,50 @@
         <p:spPr>
           <a:xfrm>
             <a:off x="2651760" y="4837176"/>
-            <a:ext cx="8778240" cy="640080"/>
-          </a:xfrm>
-          <a:prstGeom prst="rect">
-            <a:avLst/>
-          </a:prstGeom>
-          <a:noFill/>
-        </p:spPr>
-        <p:txBody>
-          <a:bodyPr wrap="square" lIns="0" rIns="0" tIns="0" bIns="0">
-            <a:spAutoFit/>
-          </a:bodyPr>
-          <a:lstStyle/>
-          <a:p>
-            <a:pPr algn="l">
-              <a:spcAft>
-                <a:spcPts val="0"/>
-              </a:spcAft>
-            </a:pPr>
-            <a:r>
-              <a:rPr sz="1400" b="1" i="0">
+            <a:ext cx="8778240" cy="215444"/>
+          </a:xfrm>
+          <a:prstGeom prst="rect">
+            <a:avLst/>
+          </a:prstGeom>
+          <a:noFill/>
+        </p:spPr>
+        <p:txBody>
+          <a:bodyPr wrap="square" lIns="0" tIns="0" rIns="0" bIns="0">
+            <a:spAutoFit/>
+          </a:bodyPr>
+          <a:lstStyle/>
+          <a:p>
+            <a:pPr algn="l">
+              <a:spcAft>
+                <a:spcPts val="0"/>
+              </a:spcAft>
+            </a:pPr>
+            <a:r>
+              <a:rPr sz="1400" b="1" i="0" dirty="0">
                 <a:solidFill>
                   <a:srgbClr val="102A43"/>
                 </a:solidFill>
                 <a:latin typeface="Segoe UI"/>
               </a:rPr>
-              <a:t>Salam Kissan. Wa Alaikum Salam, Pakistan.   (proposed: the farmer returns the greeting)</a:t>
+              <a:t>Salam </a:t>
+            </a:r>
+            <a:r>
+              <a:rPr sz="1400" b="1" i="0" dirty="0" err="1">
+                <a:solidFill>
+                  <a:srgbClr val="102A43"/>
+                </a:solidFill>
+                <a:latin typeface="Segoe UI"/>
+              </a:rPr>
+              <a:t>Kissan</a:t>
+            </a:r>
+            <a:r>
+              <a:rPr sz="1400" b="1" i="0" dirty="0">
+                <a:solidFill>
+                  <a:srgbClr val="102A43"/>
+                </a:solidFill>
+                <a:latin typeface="Segoe UI"/>
+              </a:rPr>
+              <a:t>. Salam, Pakistan.   (proposed: the farmer returns the greeting)</a:t>
             </a:r>
           </a:p>
         </p:txBody>
@@ -7752,7 +7854,7 @@
 </file>
 
 <file path=ppt/slides/slide16.xml><?xml version="1.0" encoding="utf-8"?>
-<p:sld xmlns:a="http://schemas.openxmlformats.org/drawingml/2006/main" xmlns:p="http://schemas.openxmlformats.org/presentationml/2006/main" xmlns:r="http://schemas.openxmlformats.org/officeDocument/2006/relationships">
+<p:sld xmlns:a="http://schemas.openxmlformats.org/drawingml/2006/main" xmlns:r="http://schemas.openxmlformats.org/officeDocument/2006/relationships" xmlns:p="http://schemas.openxmlformats.org/presentationml/2006/main">
   <p:cSld>
     <p:spTree>
       <p:nvGrpSpPr>
@@ -7760,7 +7862,14 @@
         <p:cNvGrpSpPr/>
         <p:nvPr/>
       </p:nvGrpSpPr>
-      <p:grpSpPr/>
+      <p:grpSpPr>
+        <a:xfrm>
+          <a:off x="0" y="0"/>
+          <a:ext cx="0" cy="0"/>
+          <a:chOff x="0" y="0"/>
+          <a:chExt cx="0" cy="0"/>
+        </a:xfrm>
+      </p:grpSpPr>
       <p:sp>
         <p:nvSpPr>
           <p:cNvPr id="2" name="Rectangle 1"/>
@@ -7802,6 +7911,7 @@
           <a:lstStyle/>
           <a:p>
             <a:pPr algn="ctr"/>
+            <a:endParaRPr/>
           </a:p>
         </p:txBody>
       </p:sp>
@@ -7822,7 +7932,7 @@
           <a:noFill/>
         </p:spPr>
         <p:txBody>
-          <a:bodyPr wrap="square" lIns="0" rIns="0" tIns="0" bIns="0">
+          <a:bodyPr wrap="square" lIns="0" tIns="0" rIns="0" bIns="0">
             <a:spAutoFit/>
           </a:bodyPr>
           <a:lstStyle/>
@@ -7861,7 +7971,7 @@
           <a:noFill/>
         </p:spPr>
         <p:txBody>
-          <a:bodyPr wrap="square" lIns="0" rIns="0" tIns="0" bIns="0">
+          <a:bodyPr wrap="square" lIns="0" tIns="0" rIns="0" bIns="0">
             <a:spAutoFit/>
           </a:bodyPr>
           <a:lstStyle/>
@@ -7924,6 +8034,7 @@
           <a:lstStyle/>
           <a:p>
             <a:pPr algn="ctr"/>
+            <a:endParaRPr/>
           </a:p>
         </p:txBody>
       </p:sp>
@@ -7944,7 +8055,7 @@
           <a:noFill/>
         </p:spPr>
         <p:txBody>
-          <a:bodyPr wrap="square" lIns="0" rIns="0" tIns="0" bIns="0">
+          <a:bodyPr wrap="square" lIns="0" tIns="0" rIns="0" bIns="0">
             <a:spAutoFit/>
           </a:bodyPr>
           <a:lstStyle/>
@@ -7983,7 +8094,7 @@
           <a:noFill/>
         </p:spPr>
         <p:txBody>
-          <a:bodyPr wrap="square" lIns="0" rIns="0" tIns="0" bIns="0">
+          <a:bodyPr wrap="square" lIns="0" tIns="0" rIns="0" bIns="0">
             <a:spAutoFit/>
           </a:bodyPr>
           <a:lstStyle/>
@@ -8046,6 +8157,7 @@
           <a:lstStyle/>
           <a:p>
             <a:pPr algn="ctr"/>
+            <a:endParaRPr/>
           </a:p>
         </p:txBody>
       </p:sp>
@@ -8066,7 +8178,7 @@
           <a:noFill/>
         </p:spPr>
         <p:txBody>
-          <a:bodyPr wrap="square" lIns="0" rIns="0" tIns="0" bIns="0">
+          <a:bodyPr wrap="square" lIns="0" tIns="0" rIns="0" bIns="0">
             <a:spAutoFit/>
           </a:bodyPr>
           <a:lstStyle/>
@@ -8105,7 +8217,7 @@
           <a:noFill/>
         </p:spPr>
         <p:txBody>
-          <a:bodyPr wrap="square" lIns="0" rIns="0" tIns="0" bIns="0">
+          <a:bodyPr wrap="square" lIns="0" tIns="0" rIns="0" bIns="0">
             <a:spAutoFit/>
           </a:bodyPr>
           <a:lstStyle/>
@@ -8144,7 +8256,7 @@
           <a:noFill/>
         </p:spPr>
         <p:txBody>
-          <a:bodyPr wrap="square" lIns="0" rIns="0" tIns="0" bIns="0">
+          <a:bodyPr wrap="square" lIns="0" tIns="0" rIns="0" bIns="0">
             <a:spAutoFit/>
           </a:bodyPr>
           <a:lstStyle/>
@@ -8183,7 +8295,7 @@
           <a:noFill/>
         </p:spPr>
         <p:txBody>
-          <a:bodyPr wrap="square" lIns="0" rIns="0" tIns="0" bIns="0">
+          <a:bodyPr wrap="square" lIns="0" tIns="0" rIns="0" bIns="0">
             <a:spAutoFit/>
           </a:bodyPr>
           <a:lstStyle/>
@@ -8246,6 +8358,7 @@
           <a:lstStyle/>
           <a:p>
             <a:pPr algn="ctr"/>
+            <a:endParaRPr/>
           </a:p>
         </p:txBody>
       </p:sp>
@@ -8266,7 +8379,7 @@
           <a:noFill/>
         </p:spPr>
         <p:txBody>
-          <a:bodyPr wrap="square" lIns="0" rIns="0" tIns="0" bIns="0">
+          <a:bodyPr wrap="square" lIns="0" tIns="0" rIns="0" bIns="0">
             <a:spAutoFit/>
           </a:bodyPr>
           <a:lstStyle/>
@@ -8305,7 +8418,7 @@
           <a:noFill/>
         </p:spPr>
         <p:txBody>
-          <a:bodyPr wrap="square" lIns="0" rIns="0" tIns="0" bIns="0">
+          <a:bodyPr wrap="square" lIns="0" tIns="0" rIns="0" bIns="0">
             <a:spAutoFit/>
           </a:bodyPr>
           <a:lstStyle/>
@@ -8344,7 +8457,7 @@
           <a:noFill/>
         </p:spPr>
         <p:txBody>
-          <a:bodyPr wrap="square" lIns="0" rIns="0" tIns="0" bIns="0">
+          <a:bodyPr wrap="square" lIns="0" tIns="0" rIns="0" bIns="0">
             <a:spAutoFit/>
           </a:bodyPr>
           <a:lstStyle/>
@@ -8383,7 +8496,7 @@
           <a:noFill/>
         </p:spPr>
         <p:txBody>
-          <a:bodyPr wrap="square" lIns="0" rIns="0" tIns="0" bIns="0">
+          <a:bodyPr wrap="square" lIns="0" tIns="0" rIns="0" bIns="0">
             <a:spAutoFit/>
           </a:bodyPr>
           <a:lstStyle/>
@@ -8414,7 +8527,7 @@
 </file>
 
 <file path=ppt/slides/slide17.xml><?xml version="1.0" encoding="utf-8"?>
-<p:sld xmlns:a="http://schemas.openxmlformats.org/drawingml/2006/main" xmlns:p="http://schemas.openxmlformats.org/presentationml/2006/main" xmlns:r="http://schemas.openxmlformats.org/officeDocument/2006/relationships">
+<p:sld xmlns:a="http://schemas.openxmlformats.org/drawingml/2006/main" xmlns:r="http://schemas.openxmlformats.org/officeDocument/2006/relationships" xmlns:p="http://schemas.openxmlformats.org/presentationml/2006/main">
   <p:cSld>
     <p:spTree>
       <p:nvGrpSpPr>
@@ -8422,7 +8535,14 @@
         <p:cNvGrpSpPr/>
         <p:nvPr/>
       </p:nvGrpSpPr>
-      <p:grpSpPr/>
+      <p:grpSpPr>
+        <a:xfrm>
+          <a:off x="0" y="0"/>
+          <a:ext cx="0" cy="0"/>
+          <a:chOff x="0" y="0"/>
+          <a:chExt cx="0" cy="0"/>
+        </a:xfrm>
+      </p:grpSpPr>
       <p:sp>
         <p:nvSpPr>
           <p:cNvPr id="2" name="Rectangle 1"/>
@@ -8464,6 +8584,7 @@
           <a:lstStyle/>
           <a:p>
             <a:pPr algn="ctr"/>
+            <a:endParaRPr/>
           </a:p>
         </p:txBody>
       </p:sp>
@@ -8484,7 +8605,7 @@
           <a:noFill/>
         </p:spPr>
         <p:txBody>
-          <a:bodyPr wrap="square" lIns="0" rIns="0" tIns="0" bIns="0">
+          <a:bodyPr wrap="square" lIns="0" tIns="0" rIns="0" bIns="0">
             <a:spAutoFit/>
           </a:bodyPr>
           <a:lstStyle/>
@@ -8523,7 +8644,7 @@
           <a:noFill/>
         </p:spPr>
         <p:txBody>
-          <a:bodyPr wrap="square" lIns="0" rIns="0" tIns="0" bIns="0">
+          <a:bodyPr wrap="square" lIns="0" tIns="0" rIns="0" bIns="0">
             <a:spAutoFit/>
           </a:bodyPr>
           <a:lstStyle/>
@@ -8586,6 +8707,7 @@
           <a:lstStyle/>
           <a:p>
             <a:pPr algn="ctr"/>
+            <a:endParaRPr/>
           </a:p>
         </p:txBody>
       </p:sp>
@@ -8606,7 +8728,7 @@
           <a:noFill/>
         </p:spPr>
         <p:txBody>
-          <a:bodyPr wrap="square" lIns="0" rIns="0" tIns="0" bIns="0">
+          <a:bodyPr wrap="square" lIns="0" tIns="0" rIns="0" bIns="0">
             <a:spAutoFit/>
           </a:bodyPr>
           <a:lstStyle/>
@@ -8645,7 +8767,7 @@
           <a:noFill/>
         </p:spPr>
         <p:txBody>
-          <a:bodyPr wrap="square" lIns="0" rIns="0" tIns="0" bIns="0">
+          <a:bodyPr wrap="square" lIns="0" tIns="0" rIns="0" bIns="0">
             <a:spAutoFit/>
           </a:bodyPr>
           <a:lstStyle/>
@@ -8708,6 +8830,7 @@
           <a:lstStyle/>
           <a:p>
             <a:pPr algn="ctr"/>
+            <a:endParaRPr/>
           </a:p>
         </p:txBody>
       </p:sp>
@@ -8728,7 +8851,7 @@
           <a:noFill/>
         </p:spPr>
         <p:txBody>
-          <a:bodyPr wrap="square" lIns="0" rIns="0" tIns="0" bIns="0">
+          <a:bodyPr wrap="square" lIns="0" tIns="0" rIns="0" bIns="0">
             <a:spAutoFit/>
           </a:bodyPr>
           <a:lstStyle/>
@@ -8767,7 +8890,7 @@
           <a:noFill/>
         </p:spPr>
         <p:txBody>
-          <a:bodyPr wrap="square" lIns="0" rIns="0" tIns="0" bIns="0">
+          <a:bodyPr wrap="square" lIns="0" tIns="0" rIns="0" bIns="0">
             <a:spAutoFit/>
           </a:bodyPr>
           <a:lstStyle/>
@@ -8806,7 +8929,7 @@
           <a:noFill/>
         </p:spPr>
         <p:txBody>
-          <a:bodyPr wrap="square" lIns="0" rIns="0" tIns="0" bIns="0">
+          <a:bodyPr wrap="square" lIns="0" tIns="0" rIns="0" bIns="0">
             <a:spAutoFit/>
           </a:bodyPr>
           <a:lstStyle/>
@@ -8845,7 +8968,7 @@
           <a:noFill/>
         </p:spPr>
         <p:txBody>
-          <a:bodyPr wrap="square" lIns="0" rIns="0" tIns="0" bIns="0">
+          <a:bodyPr wrap="square" lIns="0" tIns="0" rIns="0" bIns="0">
             <a:spAutoFit/>
           </a:bodyPr>
           <a:lstStyle/>
@@ -8884,7 +9007,7 @@
           <a:noFill/>
         </p:spPr>
         <p:txBody>
-          <a:bodyPr wrap="square" lIns="0" rIns="0" tIns="0" bIns="0">
+          <a:bodyPr wrap="square" lIns="0" tIns="0" rIns="0" bIns="0">
             <a:spAutoFit/>
           </a:bodyPr>
           <a:lstStyle/>
@@ -8923,7 +9046,7 @@
           <a:noFill/>
         </p:spPr>
         <p:txBody>
-          <a:bodyPr wrap="square" lIns="0" rIns="0" tIns="0" bIns="0">
+          <a:bodyPr wrap="square" lIns="0" tIns="0" rIns="0" bIns="0">
             <a:spAutoFit/>
           </a:bodyPr>
           <a:lstStyle/>
@@ -8962,7 +9085,7 @@
           <a:noFill/>
         </p:spPr>
         <p:txBody>
-          <a:bodyPr wrap="square" lIns="0" rIns="0" tIns="0" bIns="0">
+          <a:bodyPr wrap="square" lIns="0" tIns="0" rIns="0" bIns="0">
             <a:spAutoFit/>
           </a:bodyPr>
           <a:lstStyle/>
@@ -9001,7 +9124,7 @@
           <a:noFill/>
         </p:spPr>
         <p:txBody>
-          <a:bodyPr wrap="square" lIns="0" rIns="0" tIns="0" bIns="0">
+          <a:bodyPr wrap="square" lIns="0" tIns="0" rIns="0" bIns="0">
             <a:spAutoFit/>
           </a:bodyPr>
           <a:lstStyle/>
@@ -9064,6 +9187,7 @@
           <a:lstStyle/>
           <a:p>
             <a:pPr algn="ctr"/>
+            <a:endParaRPr/>
           </a:p>
         </p:txBody>
       </p:sp>
@@ -9084,7 +9208,7 @@
           <a:noFill/>
         </p:spPr>
         <p:txBody>
-          <a:bodyPr wrap="square" lIns="0" rIns="0" tIns="0" bIns="0">
+          <a:bodyPr wrap="square" lIns="0" tIns="0" rIns="0" bIns="0">
             <a:spAutoFit/>
           </a:bodyPr>
           <a:lstStyle/>
@@ -9123,7 +9247,7 @@
           <a:noFill/>
         </p:spPr>
         <p:txBody>
-          <a:bodyPr wrap="square" lIns="0" rIns="0" tIns="0" bIns="0">
+          <a:bodyPr wrap="square" lIns="0" tIns="0" rIns="0" bIns="0">
             <a:spAutoFit/>
           </a:bodyPr>
           <a:lstStyle/>
@@ -9162,7 +9286,7 @@
           <a:noFill/>
         </p:spPr>
         <p:txBody>
-          <a:bodyPr wrap="square" lIns="0" rIns="0" tIns="0" bIns="0">
+          <a:bodyPr wrap="square" lIns="0" tIns="0" rIns="0" bIns="0">
             <a:spAutoFit/>
           </a:bodyPr>
           <a:lstStyle/>
@@ -9201,7 +9325,7 @@
           <a:noFill/>
         </p:spPr>
         <p:txBody>
-          <a:bodyPr wrap="square" lIns="0" rIns="0" tIns="0" bIns="0">
+          <a:bodyPr wrap="square" lIns="0" tIns="0" rIns="0" bIns="0">
             <a:spAutoFit/>
           </a:bodyPr>
           <a:lstStyle/>
@@ -9240,7 +9364,7 @@
           <a:noFill/>
         </p:spPr>
         <p:txBody>
-          <a:bodyPr wrap="square" lIns="0" rIns="0" tIns="0" bIns="0">
+          <a:bodyPr wrap="square" lIns="0" tIns="0" rIns="0" bIns="0">
             <a:spAutoFit/>
           </a:bodyPr>
           <a:lstStyle/>
@@ -9279,7 +9403,7 @@
           <a:noFill/>
         </p:spPr>
         <p:txBody>
-          <a:bodyPr wrap="square" lIns="0" rIns="0" tIns="0" bIns="0">
+          <a:bodyPr wrap="square" lIns="0" tIns="0" rIns="0" bIns="0">
             <a:spAutoFit/>
           </a:bodyPr>
           <a:lstStyle/>
@@ -9318,7 +9442,7 @@
           <a:noFill/>
         </p:spPr>
         <p:txBody>
-          <a:bodyPr wrap="square" lIns="0" rIns="0" tIns="0" bIns="0">
+          <a:bodyPr wrap="square" lIns="0" tIns="0" rIns="0" bIns="0">
             <a:spAutoFit/>
           </a:bodyPr>
           <a:lstStyle/>
@@ -9357,7 +9481,7 @@
           <a:noFill/>
         </p:spPr>
         <p:txBody>
-          <a:bodyPr wrap="square" lIns="0" rIns="0" tIns="0" bIns="0">
+          <a:bodyPr wrap="square" lIns="0" tIns="0" rIns="0" bIns="0">
             <a:spAutoFit/>
           </a:bodyPr>
           <a:lstStyle/>
@@ -9420,6 +9544,7 @@
           <a:lstStyle/>
           <a:p>
             <a:pPr algn="ctr"/>
+            <a:endParaRPr/>
           </a:p>
         </p:txBody>
       </p:sp>
@@ -9440,7 +9565,7 @@
           <a:noFill/>
         </p:spPr>
         <p:txBody>
-          <a:bodyPr wrap="square" lIns="0" rIns="0" tIns="0" bIns="0">
+          <a:bodyPr wrap="square" lIns="0" tIns="0" rIns="0" bIns="0">
             <a:spAutoFit/>
           </a:bodyPr>
           <a:lstStyle/>
@@ -9479,7 +9604,7 @@
           <a:noFill/>
         </p:spPr>
         <p:txBody>
-          <a:bodyPr wrap="square" lIns="0" rIns="0" tIns="0" bIns="0">
+          <a:bodyPr wrap="square" lIns="0" tIns="0" rIns="0" bIns="0">
             <a:spAutoFit/>
           </a:bodyPr>
           <a:lstStyle/>
@@ -9518,7 +9643,7 @@
           <a:noFill/>
         </p:spPr>
         <p:txBody>
-          <a:bodyPr wrap="square" lIns="0" rIns="0" tIns="0" bIns="0">
+          <a:bodyPr wrap="square" lIns="0" tIns="0" rIns="0" bIns="0">
             <a:spAutoFit/>
           </a:bodyPr>
           <a:lstStyle/>
@@ -9557,7 +9682,7 @@
           <a:noFill/>
         </p:spPr>
         <p:txBody>
-          <a:bodyPr wrap="square" lIns="0" rIns="0" tIns="0" bIns="0">
+          <a:bodyPr wrap="square" lIns="0" tIns="0" rIns="0" bIns="0">
             <a:spAutoFit/>
           </a:bodyPr>
           <a:lstStyle/>
@@ -9596,7 +9721,7 @@
           <a:noFill/>
         </p:spPr>
         <p:txBody>
-          <a:bodyPr wrap="square" lIns="0" rIns="0" tIns="0" bIns="0">
+          <a:bodyPr wrap="square" lIns="0" tIns="0" rIns="0" bIns="0">
             <a:spAutoFit/>
           </a:bodyPr>
           <a:lstStyle/>
@@ -9635,7 +9760,7 @@
           <a:noFill/>
         </p:spPr>
         <p:txBody>
-          <a:bodyPr wrap="square" lIns="0" rIns="0" tIns="0" bIns="0">
+          <a:bodyPr wrap="square" lIns="0" tIns="0" rIns="0" bIns="0">
             <a:spAutoFit/>
           </a:bodyPr>
           <a:lstStyle/>
@@ -9674,7 +9799,7 @@
           <a:noFill/>
         </p:spPr>
         <p:txBody>
-          <a:bodyPr wrap="square" lIns="0" rIns="0" tIns="0" bIns="0">
+          <a:bodyPr wrap="square" lIns="0" tIns="0" rIns="0" bIns="0">
             <a:spAutoFit/>
           </a:bodyPr>
           <a:lstStyle/>
@@ -9713,7 +9838,7 @@
           <a:noFill/>
         </p:spPr>
         <p:txBody>
-          <a:bodyPr wrap="square" lIns="0" rIns="0" tIns="0" bIns="0">
+          <a:bodyPr wrap="square" lIns="0" tIns="0" rIns="0" bIns="0">
             <a:spAutoFit/>
           </a:bodyPr>
           <a:lstStyle/>
@@ -9776,6 +9901,7 @@
           <a:lstStyle/>
           <a:p>
             <a:pPr algn="ctr"/>
+            <a:endParaRPr/>
           </a:p>
         </p:txBody>
       </p:sp>
@@ -9796,7 +9922,7 @@
           <a:noFill/>
         </p:spPr>
         <p:txBody>
-          <a:bodyPr wrap="square" lIns="0" rIns="0" tIns="0" bIns="0">
+          <a:bodyPr wrap="square" lIns="0" tIns="0" rIns="0" bIns="0">
             <a:spAutoFit/>
           </a:bodyPr>
           <a:lstStyle/>
@@ -9835,7 +9961,7 @@
           <a:noFill/>
         </p:spPr>
         <p:txBody>
-          <a:bodyPr wrap="square" lIns="0" rIns="0" tIns="0" bIns="0">
+          <a:bodyPr wrap="square" lIns="0" tIns="0" rIns="0" bIns="0">
             <a:spAutoFit/>
           </a:bodyPr>
           <a:lstStyle/>
@@ -9874,7 +10000,7 @@
           <a:noFill/>
         </p:spPr>
         <p:txBody>
-          <a:bodyPr wrap="square" lIns="0" rIns="0" tIns="0" bIns="0">
+          <a:bodyPr wrap="square" lIns="0" tIns="0" rIns="0" bIns="0">
             <a:spAutoFit/>
           </a:bodyPr>
           <a:lstStyle/>
@@ -9913,7 +10039,7 @@
           <a:noFill/>
         </p:spPr>
         <p:txBody>
-          <a:bodyPr wrap="square" lIns="0" rIns="0" tIns="0" bIns="0">
+          <a:bodyPr wrap="square" lIns="0" tIns="0" rIns="0" bIns="0">
             <a:spAutoFit/>
           </a:bodyPr>
           <a:lstStyle/>
@@ -9944,7 +10070,7 @@
 </file>
 
 <file path=ppt/slides/slide18.xml><?xml version="1.0" encoding="utf-8"?>
-<p:sld xmlns:a="http://schemas.openxmlformats.org/drawingml/2006/main" xmlns:p="http://schemas.openxmlformats.org/presentationml/2006/main" xmlns:r="http://schemas.openxmlformats.org/officeDocument/2006/relationships">
+<p:sld xmlns:a="http://schemas.openxmlformats.org/drawingml/2006/main" xmlns:r="http://schemas.openxmlformats.org/officeDocument/2006/relationships" xmlns:p="http://schemas.openxmlformats.org/presentationml/2006/main">
   <p:cSld>
     <p:spTree>
       <p:nvGrpSpPr>
@@ -9952,7 +10078,14 @@
         <p:cNvGrpSpPr/>
         <p:nvPr/>
       </p:nvGrpSpPr>
-      <p:grpSpPr/>
+      <p:grpSpPr>
+        <a:xfrm>
+          <a:off x="0" y="0"/>
+          <a:ext cx="0" cy="0"/>
+          <a:chOff x="0" y="0"/>
+          <a:chExt cx="0" cy="0"/>
+        </a:xfrm>
+      </p:grpSpPr>
       <p:sp>
         <p:nvSpPr>
           <p:cNvPr id="2" name="Rectangle 1"/>
@@ -9994,6 +10127,7 @@
           <a:lstStyle/>
           <a:p>
             <a:pPr algn="ctr"/>
+            <a:endParaRPr/>
           </a:p>
         </p:txBody>
       </p:sp>
@@ -10014,7 +10148,7 @@
           <a:noFill/>
         </p:spPr>
         <p:txBody>
-          <a:bodyPr wrap="square" lIns="0" rIns="0" tIns="0" bIns="0">
+          <a:bodyPr wrap="square" lIns="0" tIns="0" rIns="0" bIns="0">
             <a:spAutoFit/>
           </a:bodyPr>
           <a:lstStyle/>
@@ -10053,7 +10187,7 @@
           <a:noFill/>
         </p:spPr>
         <p:txBody>
-          <a:bodyPr wrap="square" lIns="0" rIns="0" tIns="0" bIns="0">
+          <a:bodyPr wrap="square" lIns="0" tIns="0" rIns="0" bIns="0">
             <a:spAutoFit/>
           </a:bodyPr>
           <a:lstStyle/>
@@ -10116,6 +10250,7 @@
           <a:lstStyle/>
           <a:p>
             <a:pPr algn="ctr"/>
+            <a:endParaRPr/>
           </a:p>
         </p:txBody>
       </p:sp>
@@ -10136,7 +10271,7 @@
           <a:noFill/>
         </p:spPr>
         <p:txBody>
-          <a:bodyPr wrap="square" lIns="0" rIns="0" tIns="0" bIns="0">
+          <a:bodyPr wrap="square" lIns="0" tIns="0" rIns="0" bIns="0">
             <a:spAutoFit/>
           </a:bodyPr>
           <a:lstStyle/>
@@ -10175,7 +10310,7 @@
           <a:noFill/>
         </p:spPr>
         <p:txBody>
-          <a:bodyPr wrap="square" lIns="0" rIns="0" tIns="0" bIns="0">
+          <a:bodyPr wrap="square" lIns="0" tIns="0" rIns="0" bIns="0">
             <a:spAutoFit/>
           </a:bodyPr>
           <a:lstStyle/>
@@ -10238,6 +10373,7 @@
           <a:lstStyle/>
           <a:p>
             <a:pPr algn="ctr"/>
+            <a:endParaRPr/>
           </a:p>
         </p:txBody>
       </p:sp>
@@ -10258,7 +10394,7 @@
           <a:noFill/>
         </p:spPr>
         <p:txBody>
-          <a:bodyPr wrap="square" lIns="0" rIns="0" tIns="0" bIns="0">
+          <a:bodyPr wrap="square" lIns="0" tIns="0" rIns="0" bIns="0">
             <a:spAutoFit/>
           </a:bodyPr>
           <a:lstStyle/>
@@ -10321,6 +10457,7 @@
           <a:lstStyle/>
           <a:p>
             <a:pPr algn="ctr"/>
+            <a:endParaRPr/>
           </a:p>
         </p:txBody>
       </p:sp>
@@ -10341,7 +10478,7 @@
           <a:noFill/>
         </p:spPr>
         <p:txBody>
-          <a:bodyPr wrap="square" lIns="0" rIns="0" tIns="0" bIns="0">
+          <a:bodyPr wrap="square" lIns="0" tIns="0" rIns="0" bIns="0">
             <a:spAutoFit/>
           </a:bodyPr>
           <a:lstStyle/>
@@ -10404,6 +10541,7 @@
           <a:lstStyle/>
           <a:p>
             <a:pPr algn="ctr"/>
+            <a:endParaRPr/>
           </a:p>
         </p:txBody>
       </p:sp>
@@ -10424,7 +10562,7 @@
           <a:noFill/>
         </p:spPr>
         <p:txBody>
-          <a:bodyPr wrap="square" lIns="0" rIns="0" tIns="0" bIns="0">
+          <a:bodyPr wrap="square" lIns="0" tIns="0" rIns="0" bIns="0">
             <a:spAutoFit/>
           </a:bodyPr>
           <a:lstStyle/>
@@ -10487,6 +10625,7 @@
           <a:lstStyle/>
           <a:p>
             <a:pPr algn="ctr"/>
+            <a:endParaRPr/>
           </a:p>
         </p:txBody>
       </p:sp>
@@ -10507,7 +10646,7 @@
           <a:noFill/>
         </p:spPr>
         <p:txBody>
-          <a:bodyPr wrap="square" lIns="0" rIns="0" tIns="0" bIns="0">
+          <a:bodyPr wrap="square" lIns="0" tIns="0" rIns="0" bIns="0">
             <a:spAutoFit/>
           </a:bodyPr>
           <a:lstStyle/>
@@ -10570,6 +10709,7 @@
           <a:lstStyle/>
           <a:p>
             <a:pPr algn="ctr"/>
+            <a:endParaRPr/>
           </a:p>
         </p:txBody>
       </p:sp>
@@ -10590,7 +10730,7 @@
           <a:noFill/>
         </p:spPr>
         <p:txBody>
-          <a:bodyPr wrap="square" lIns="0" rIns="0" tIns="0" bIns="0">
+          <a:bodyPr wrap="square" lIns="0" tIns="0" rIns="0" bIns="0">
             <a:spAutoFit/>
           </a:bodyPr>
           <a:lstStyle/>
@@ -10653,6 +10793,7 @@
           <a:lstStyle/>
           <a:p>
             <a:pPr algn="ctr"/>
+            <a:endParaRPr/>
           </a:p>
         </p:txBody>
       </p:sp>
@@ -10673,7 +10814,7 @@
           <a:noFill/>
         </p:spPr>
         <p:txBody>
-          <a:bodyPr wrap="square" lIns="0" rIns="0" tIns="0" bIns="0">
+          <a:bodyPr wrap="square" lIns="0" tIns="0" rIns="0" bIns="0">
             <a:spAutoFit/>
           </a:bodyPr>
           <a:lstStyle/>
@@ -10736,6 +10877,7 @@
           <a:lstStyle/>
           <a:p>
             <a:pPr algn="ctr"/>
+            <a:endParaRPr/>
           </a:p>
         </p:txBody>
       </p:sp>
@@ -10756,7 +10898,7 @@
           <a:noFill/>
         </p:spPr>
         <p:txBody>
-          <a:bodyPr wrap="square" lIns="0" rIns="0" tIns="0" bIns="0">
+          <a:bodyPr wrap="square" lIns="0" tIns="0" rIns="0" bIns="0">
             <a:spAutoFit/>
           </a:bodyPr>
           <a:lstStyle/>
@@ -10819,6 +10961,7 @@
           <a:lstStyle/>
           <a:p>
             <a:pPr algn="ctr"/>
+            <a:endParaRPr/>
           </a:p>
         </p:txBody>
       </p:sp>
@@ -10839,7 +10982,7 @@
           <a:noFill/>
         </p:spPr>
         <p:txBody>
-          <a:bodyPr wrap="square" lIns="0" rIns="0" tIns="0" bIns="0">
+          <a:bodyPr wrap="square" lIns="0" tIns="0" rIns="0" bIns="0">
             <a:spAutoFit/>
           </a:bodyPr>
           <a:lstStyle/>
@@ -10870,7 +11013,7 @@
 </file>
 
 <file path=ppt/slides/slide19.xml><?xml version="1.0" encoding="utf-8"?>
-<p:sld xmlns:a="http://schemas.openxmlformats.org/drawingml/2006/main" xmlns:p="http://schemas.openxmlformats.org/presentationml/2006/main" xmlns:r="http://schemas.openxmlformats.org/officeDocument/2006/relationships">
+<p:sld xmlns:a="http://schemas.openxmlformats.org/drawingml/2006/main" xmlns:r="http://schemas.openxmlformats.org/officeDocument/2006/relationships" xmlns:p="http://schemas.openxmlformats.org/presentationml/2006/main">
   <p:cSld>
     <p:spTree>
       <p:nvGrpSpPr>
@@ -10878,7 +11021,14 @@
         <p:cNvGrpSpPr/>
         <p:nvPr/>
       </p:nvGrpSpPr>
-      <p:grpSpPr/>
+      <p:grpSpPr>
+        <a:xfrm>
+          <a:off x="0" y="0"/>
+          <a:ext cx="0" cy="0"/>
+          <a:chOff x="0" y="0"/>
+          <a:chExt cx="0" cy="0"/>
+        </a:xfrm>
+      </p:grpSpPr>
       <p:sp>
         <p:nvSpPr>
           <p:cNvPr id="2" name="Rectangle 1"/>
@@ -10920,6 +11070,7 @@
           <a:lstStyle/>
           <a:p>
             <a:pPr algn="ctr"/>
+            <a:endParaRPr/>
           </a:p>
         </p:txBody>
       </p:sp>
@@ -10940,7 +11091,7 @@
           <a:noFill/>
         </p:spPr>
         <p:txBody>
-          <a:bodyPr wrap="square" lIns="0" rIns="0" tIns="0" bIns="0">
+          <a:bodyPr wrap="square" lIns="0" tIns="0" rIns="0" bIns="0">
             <a:spAutoFit/>
           </a:bodyPr>
           <a:lstStyle/>
@@ -10979,7 +11130,7 @@
           <a:noFill/>
         </p:spPr>
         <p:txBody>
-          <a:bodyPr wrap="square" lIns="0" rIns="0" tIns="0" bIns="0">
+          <a:bodyPr wrap="square" lIns="0" tIns="0" rIns="0" bIns="0">
             <a:spAutoFit/>
           </a:bodyPr>
           <a:lstStyle/>
@@ -11042,6 +11193,7 @@
           <a:lstStyle/>
           <a:p>
             <a:pPr algn="ctr"/>
+            <a:endParaRPr/>
           </a:p>
         </p:txBody>
       </p:sp>
@@ -11062,7 +11214,7 @@
           <a:noFill/>
         </p:spPr>
         <p:txBody>
-          <a:bodyPr wrap="square" lIns="0" rIns="0" tIns="0" bIns="0">
+          <a:bodyPr wrap="square" lIns="0" tIns="0" rIns="0" bIns="0">
             <a:spAutoFit/>
           </a:bodyPr>
           <a:lstStyle/>
@@ -11101,7 +11253,7 @@
           <a:noFill/>
         </p:spPr>
         <p:txBody>
-          <a:bodyPr wrap="square" lIns="0" rIns="0" tIns="0" bIns="0">
+          <a:bodyPr wrap="square" lIns="0" tIns="0" rIns="0" bIns="0">
             <a:spAutoFit/>
           </a:bodyPr>
           <a:lstStyle/>
@@ -11164,6 +11316,7 @@
           <a:lstStyle/>
           <a:p>
             <a:pPr algn="ctr"/>
+            <a:endParaRPr/>
           </a:p>
         </p:txBody>
       </p:sp>
@@ -11208,6 +11361,7 @@
           <a:lstStyle/>
           <a:p>
             <a:pPr algn="ctr"/>
+            <a:endParaRPr/>
           </a:p>
         </p:txBody>
       </p:sp>
@@ -11228,7 +11382,7 @@
           <a:noFill/>
         </p:spPr>
         <p:txBody>
-          <a:bodyPr wrap="square" lIns="0" rIns="0" tIns="0" bIns="0">
+          <a:bodyPr wrap="square" lIns="0" tIns="0" rIns="0" bIns="0">
             <a:spAutoFit/>
           </a:bodyPr>
           <a:lstStyle/>
@@ -11267,7 +11421,7 @@
           <a:noFill/>
         </p:spPr>
         <p:txBody>
-          <a:bodyPr wrap="square" lIns="0" rIns="0" tIns="0" bIns="0">
+          <a:bodyPr wrap="square" lIns="0" tIns="0" rIns="0" bIns="0">
             <a:spAutoFit/>
           </a:bodyPr>
           <a:lstStyle/>
@@ -11330,6 +11484,7 @@
           <a:lstStyle/>
           <a:p>
             <a:pPr algn="ctr"/>
+            <a:endParaRPr/>
           </a:p>
         </p:txBody>
       </p:sp>
@@ -11374,6 +11529,7 @@
           <a:lstStyle/>
           <a:p>
             <a:pPr algn="ctr"/>
+            <a:endParaRPr/>
           </a:p>
         </p:txBody>
       </p:sp>
@@ -11394,7 +11550,7 @@
           <a:noFill/>
         </p:spPr>
         <p:txBody>
-          <a:bodyPr wrap="square" lIns="0" rIns="0" tIns="0" bIns="0">
+          <a:bodyPr wrap="square" lIns="0" tIns="0" rIns="0" bIns="0">
             <a:spAutoFit/>
           </a:bodyPr>
           <a:lstStyle/>
@@ -11433,7 +11589,7 @@
           <a:noFill/>
         </p:spPr>
         <p:txBody>
-          <a:bodyPr wrap="square" lIns="0" rIns="0" tIns="0" bIns="0">
+          <a:bodyPr wrap="square" lIns="0" tIns="0" rIns="0" bIns="0">
             <a:spAutoFit/>
           </a:bodyPr>
           <a:lstStyle/>
@@ -11496,6 +11652,7 @@
           <a:lstStyle/>
           <a:p>
             <a:pPr algn="ctr"/>
+            <a:endParaRPr/>
           </a:p>
         </p:txBody>
       </p:sp>
@@ -11540,6 +11697,7 @@
           <a:lstStyle/>
           <a:p>
             <a:pPr algn="ctr"/>
+            <a:endParaRPr/>
           </a:p>
         </p:txBody>
       </p:sp>
@@ -11560,7 +11718,7 @@
           <a:noFill/>
         </p:spPr>
         <p:txBody>
-          <a:bodyPr wrap="square" lIns="0" rIns="0" tIns="0" bIns="0">
+          <a:bodyPr wrap="square" lIns="0" tIns="0" rIns="0" bIns="0">
             <a:spAutoFit/>
           </a:bodyPr>
           <a:lstStyle/>
@@ -11599,7 +11757,7 @@
           <a:noFill/>
         </p:spPr>
         <p:txBody>
-          <a:bodyPr wrap="square" lIns="0" rIns="0" tIns="0" bIns="0">
+          <a:bodyPr wrap="square" lIns="0" tIns="0" rIns="0" bIns="0">
             <a:spAutoFit/>
           </a:bodyPr>
           <a:lstStyle/>
@@ -11662,6 +11820,7 @@
           <a:lstStyle/>
           <a:p>
             <a:pPr algn="ctr"/>
+            <a:endParaRPr/>
           </a:p>
         </p:txBody>
       </p:sp>
@@ -11706,6 +11865,7 @@
           <a:lstStyle/>
           <a:p>
             <a:pPr algn="ctr"/>
+            <a:endParaRPr/>
           </a:p>
         </p:txBody>
       </p:sp>
@@ -11726,7 +11886,7 @@
           <a:noFill/>
         </p:spPr>
         <p:txBody>
-          <a:bodyPr wrap="square" lIns="0" rIns="0" tIns="0" bIns="0">
+          <a:bodyPr wrap="square" lIns="0" tIns="0" rIns="0" bIns="0">
             <a:spAutoFit/>
           </a:bodyPr>
           <a:lstStyle/>
@@ -11765,7 +11925,7 @@
           <a:noFill/>
         </p:spPr>
         <p:txBody>
-          <a:bodyPr wrap="square" lIns="0" rIns="0" tIns="0" bIns="0">
+          <a:bodyPr wrap="square" lIns="0" tIns="0" rIns="0" bIns="0">
             <a:spAutoFit/>
           </a:bodyPr>
           <a:lstStyle/>
@@ -11828,6 +11988,7 @@
           <a:lstStyle/>
           <a:p>
             <a:pPr algn="ctr"/>
+            <a:endParaRPr/>
           </a:p>
         </p:txBody>
       </p:sp>
@@ -11872,6 +12033,7 @@
           <a:lstStyle/>
           <a:p>
             <a:pPr algn="ctr"/>
+            <a:endParaRPr/>
           </a:p>
         </p:txBody>
       </p:sp>
@@ -11892,7 +12054,7 @@
           <a:noFill/>
         </p:spPr>
         <p:txBody>
-          <a:bodyPr wrap="square" lIns="0" rIns="0" tIns="0" bIns="0">
+          <a:bodyPr wrap="square" lIns="0" tIns="0" rIns="0" bIns="0">
             <a:spAutoFit/>
           </a:bodyPr>
           <a:lstStyle/>
@@ -11931,7 +12093,7 @@
           <a:noFill/>
         </p:spPr>
         <p:txBody>
-          <a:bodyPr wrap="square" lIns="0" rIns="0" tIns="0" bIns="0">
+          <a:bodyPr wrap="square" lIns="0" tIns="0" rIns="0" bIns="0">
             <a:spAutoFit/>
           </a:bodyPr>
           <a:lstStyle/>
@@ -11994,6 +12156,7 @@
           <a:lstStyle/>
           <a:p>
             <a:pPr algn="ctr"/>
+            <a:endParaRPr/>
           </a:p>
         </p:txBody>
       </p:sp>
@@ -12038,6 +12201,7 @@
           <a:lstStyle/>
           <a:p>
             <a:pPr algn="ctr"/>
+            <a:endParaRPr/>
           </a:p>
         </p:txBody>
       </p:sp>
@@ -12058,7 +12222,7 @@
           <a:noFill/>
         </p:spPr>
         <p:txBody>
-          <a:bodyPr wrap="square" lIns="0" rIns="0" tIns="0" bIns="0">
+          <a:bodyPr wrap="square" lIns="0" tIns="0" rIns="0" bIns="0">
             <a:spAutoFit/>
           </a:bodyPr>
           <a:lstStyle/>
@@ -12097,7 +12261,7 @@
           <a:noFill/>
         </p:spPr>
         <p:txBody>
-          <a:bodyPr wrap="square" lIns="0" rIns="0" tIns="0" bIns="0">
+          <a:bodyPr wrap="square" lIns="0" tIns="0" rIns="0" bIns="0">
             <a:spAutoFit/>
           </a:bodyPr>
           <a:lstStyle/>
@@ -12128,7 +12292,7 @@
 </file>
 
 <file path=ppt/slides/slide2.xml><?xml version="1.0" encoding="utf-8"?>
-<p:sld xmlns:a="http://schemas.openxmlformats.org/drawingml/2006/main" xmlns:p="http://schemas.openxmlformats.org/presentationml/2006/main" xmlns:r="http://schemas.openxmlformats.org/officeDocument/2006/relationships">
+<p:sld xmlns:a="http://schemas.openxmlformats.org/drawingml/2006/main" xmlns:r="http://schemas.openxmlformats.org/officeDocument/2006/relationships" xmlns:p="http://schemas.openxmlformats.org/presentationml/2006/main">
   <p:cSld>
     <p:spTree>
       <p:nvGrpSpPr>
@@ -12136,7 +12300,14 @@
         <p:cNvGrpSpPr/>
         <p:nvPr/>
       </p:nvGrpSpPr>
-      <p:grpSpPr/>
+      <p:grpSpPr>
+        <a:xfrm>
+          <a:off x="0" y="0"/>
+          <a:ext cx="0" cy="0"/>
+          <a:chOff x="0" y="0"/>
+          <a:chExt cx="0" cy="0"/>
+        </a:xfrm>
+      </p:grpSpPr>
       <p:sp>
         <p:nvSpPr>
           <p:cNvPr id="2" name="Rectangle 1"/>
@@ -12178,6 +12349,7 @@
           <a:lstStyle/>
           <a:p>
             <a:pPr algn="ctr"/>
+            <a:endParaRPr/>
           </a:p>
         </p:txBody>
       </p:sp>
@@ -12198,7 +12370,7 @@
           <a:noFill/>
         </p:spPr>
         <p:txBody>
-          <a:bodyPr wrap="square" lIns="0" rIns="0" tIns="0" bIns="0">
+          <a:bodyPr wrap="square" lIns="0" tIns="0" rIns="0" bIns="0">
             <a:spAutoFit/>
           </a:bodyPr>
           <a:lstStyle/>
@@ -12237,7 +12409,7 @@
           <a:noFill/>
         </p:spPr>
         <p:txBody>
-          <a:bodyPr wrap="square" lIns="0" rIns="0" tIns="0" bIns="0">
+          <a:bodyPr wrap="square" lIns="0" tIns="0" rIns="0" bIns="0">
             <a:spAutoFit/>
           </a:bodyPr>
           <a:lstStyle/>
@@ -12300,6 +12472,7 @@
           <a:lstStyle/>
           <a:p>
             <a:pPr algn="ctr"/>
+            <a:endParaRPr/>
           </a:p>
         </p:txBody>
       </p:sp>
@@ -12320,7 +12493,7 @@
           <a:noFill/>
         </p:spPr>
         <p:txBody>
-          <a:bodyPr wrap="square" lIns="0" rIns="0" tIns="0" bIns="0">
+          <a:bodyPr wrap="square" lIns="0" tIns="0" rIns="0" bIns="0">
             <a:spAutoFit/>
           </a:bodyPr>
           <a:lstStyle/>
@@ -12359,7 +12532,7 @@
           <a:noFill/>
         </p:spPr>
         <p:txBody>
-          <a:bodyPr wrap="square" lIns="0" rIns="0" tIns="0" bIns="0">
+          <a:bodyPr wrap="square" lIns="0" tIns="0" rIns="0" bIns="0">
             <a:spAutoFit/>
           </a:bodyPr>
           <a:lstStyle/>
@@ -12398,7 +12571,7 @@
           <a:noFill/>
         </p:spPr>
         <p:txBody>
-          <a:bodyPr wrap="square" lIns="0" rIns="0" tIns="0" bIns="0">
+          <a:bodyPr wrap="square" lIns="0" tIns="0" rIns="0" bIns="0">
             <a:spAutoFit/>
           </a:bodyPr>
           <a:lstStyle/>
@@ -12437,7 +12610,7 @@
           <a:noFill/>
         </p:spPr>
         <p:txBody>
-          <a:bodyPr wrap="square" lIns="0" rIns="0" tIns="0" bIns="0">
+          <a:bodyPr wrap="square" lIns="0" tIns="0" rIns="0" bIns="0">
             <a:spAutoFit/>
           </a:bodyPr>
           <a:lstStyle/>
@@ -12524,7 +12697,7 @@
           <a:noFill/>
         </p:spPr>
         <p:txBody>
-          <a:bodyPr wrap="square" lIns="0" rIns="0" tIns="0" bIns="0">
+          <a:bodyPr wrap="square" lIns="0" tIns="0" rIns="0" bIns="0">
             <a:spAutoFit/>
           </a:bodyPr>
           <a:lstStyle/>
@@ -12563,7 +12736,7 @@
           <a:noFill/>
         </p:spPr>
         <p:txBody>
-          <a:bodyPr wrap="square" lIns="0" rIns="0" tIns="0" bIns="0">
+          <a:bodyPr wrap="square" lIns="0" tIns="0" rIns="0" bIns="0">
             <a:spAutoFit/>
           </a:bodyPr>
           <a:lstStyle/>
@@ -12658,6 +12831,7 @@
           <a:lstStyle/>
           <a:p>
             <a:pPr algn="ctr"/>
+            <a:endParaRPr/>
           </a:p>
         </p:txBody>
       </p:sp>
@@ -12702,6 +12876,7 @@
           <a:lstStyle/>
           <a:p>
             <a:pPr algn="ctr"/>
+            <a:endParaRPr/>
           </a:p>
         </p:txBody>
       </p:sp>
@@ -12722,7 +12897,7 @@
           <a:noFill/>
         </p:spPr>
         <p:txBody>
-          <a:bodyPr wrap="square" lIns="0" rIns="0" tIns="0" bIns="0">
+          <a:bodyPr wrap="square" lIns="0" tIns="0" rIns="0" bIns="0">
             <a:spAutoFit/>
           </a:bodyPr>
           <a:lstStyle/>
@@ -12761,7 +12936,7 @@
           <a:noFill/>
         </p:spPr>
         <p:txBody>
-          <a:bodyPr wrap="square" lIns="0" rIns="0" tIns="0" bIns="0">
+          <a:bodyPr wrap="square" lIns="0" tIns="0" rIns="0" bIns="0">
             <a:spAutoFit/>
           </a:bodyPr>
           <a:lstStyle/>
@@ -12808,7 +12983,7 @@
 </file>
 
 <file path=ppt/slides/slide3.xml><?xml version="1.0" encoding="utf-8"?>
-<p:sld xmlns:a="http://schemas.openxmlformats.org/drawingml/2006/main" xmlns:p="http://schemas.openxmlformats.org/presentationml/2006/main" xmlns:r="http://schemas.openxmlformats.org/officeDocument/2006/relationships">
+<p:sld xmlns:a="http://schemas.openxmlformats.org/drawingml/2006/main" xmlns:r="http://schemas.openxmlformats.org/officeDocument/2006/relationships" xmlns:p="http://schemas.openxmlformats.org/presentationml/2006/main">
   <p:cSld>
     <p:spTree>
       <p:nvGrpSpPr>
@@ -12816,7 +12991,14 @@
         <p:cNvGrpSpPr/>
         <p:nvPr/>
       </p:nvGrpSpPr>
-      <p:grpSpPr/>
+      <p:grpSpPr>
+        <a:xfrm>
+          <a:off x="0" y="0"/>
+          <a:ext cx="0" cy="0"/>
+          <a:chOff x="0" y="0"/>
+          <a:chExt cx="0" cy="0"/>
+        </a:xfrm>
+      </p:grpSpPr>
       <p:sp>
         <p:nvSpPr>
           <p:cNvPr id="2" name="Rectangle 1"/>
@@ -12858,6 +13040,7 @@
           <a:lstStyle/>
           <a:p>
             <a:pPr algn="ctr"/>
+            <a:endParaRPr/>
           </a:p>
         </p:txBody>
       </p:sp>
@@ -12878,7 +13061,7 @@
           <a:noFill/>
         </p:spPr>
         <p:txBody>
-          <a:bodyPr wrap="square" lIns="0" rIns="0" tIns="0" bIns="0">
+          <a:bodyPr wrap="square" lIns="0" tIns="0" rIns="0" bIns="0">
             <a:spAutoFit/>
           </a:bodyPr>
           <a:lstStyle/>
@@ -12917,7 +13100,7 @@
           <a:noFill/>
         </p:spPr>
         <p:txBody>
-          <a:bodyPr wrap="square" lIns="0" rIns="0" tIns="0" bIns="0">
+          <a:bodyPr wrap="square" lIns="0" tIns="0" rIns="0" bIns="0">
             <a:spAutoFit/>
           </a:bodyPr>
           <a:lstStyle/>
@@ -12980,6 +13163,7 @@
           <a:lstStyle/>
           <a:p>
             <a:pPr algn="ctr"/>
+            <a:endParaRPr/>
           </a:p>
         </p:txBody>
       </p:sp>
@@ -13000,7 +13184,7 @@
           <a:noFill/>
         </p:spPr>
         <p:txBody>
-          <a:bodyPr wrap="square" lIns="0" rIns="0" tIns="0" bIns="0">
+          <a:bodyPr wrap="square" lIns="0" tIns="0" rIns="0" bIns="0">
             <a:spAutoFit/>
           </a:bodyPr>
           <a:lstStyle/>
@@ -13039,7 +13223,7 @@
           <a:noFill/>
         </p:spPr>
         <p:txBody>
-          <a:bodyPr wrap="square" lIns="0" rIns="0" tIns="0" bIns="0">
+          <a:bodyPr wrap="square" lIns="0" tIns="0" rIns="0" bIns="0">
             <a:spAutoFit/>
           </a:bodyPr>
           <a:lstStyle/>
@@ -13102,6 +13286,7 @@
           <a:lstStyle/>
           <a:p>
             <a:pPr algn="ctr"/>
+            <a:endParaRPr/>
           </a:p>
         </p:txBody>
       </p:sp>
@@ -13122,7 +13307,7 @@
           <a:noFill/>
         </p:spPr>
         <p:txBody>
-          <a:bodyPr wrap="square" lIns="0" rIns="0" tIns="0" bIns="0">
+          <a:bodyPr wrap="square" lIns="0" tIns="0" rIns="0" bIns="0">
             <a:spAutoFit/>
           </a:bodyPr>
           <a:lstStyle/>
@@ -13161,7 +13346,7 @@
           <a:noFill/>
         </p:spPr>
         <p:txBody>
-          <a:bodyPr wrap="square" lIns="0" rIns="0" tIns="0" bIns="0">
+          <a:bodyPr wrap="square" lIns="0" tIns="0" rIns="0" bIns="0">
             <a:spAutoFit/>
           </a:bodyPr>
           <a:lstStyle/>
@@ -13200,7 +13385,7 @@
           <a:noFill/>
         </p:spPr>
         <p:txBody>
-          <a:bodyPr wrap="square" lIns="0" rIns="0" tIns="0" bIns="0">
+          <a:bodyPr wrap="square" lIns="0" tIns="0" rIns="0" bIns="0">
             <a:spAutoFit/>
           </a:bodyPr>
           <a:lstStyle/>
@@ -13239,7 +13424,7 @@
           <a:noFill/>
         </p:spPr>
         <p:txBody>
-          <a:bodyPr wrap="square" lIns="0" rIns="0" tIns="0" bIns="0">
+          <a:bodyPr wrap="square" lIns="0" tIns="0" rIns="0" bIns="0">
             <a:spAutoFit/>
           </a:bodyPr>
           <a:lstStyle/>
@@ -13278,7 +13463,7 @@
           <a:noFill/>
         </p:spPr>
         <p:txBody>
-          <a:bodyPr wrap="square" lIns="0" rIns="0" tIns="0" bIns="0">
+          <a:bodyPr wrap="square" lIns="0" tIns="0" rIns="0" bIns="0">
             <a:spAutoFit/>
           </a:bodyPr>
           <a:lstStyle/>
@@ -13317,7 +13502,7 @@
           <a:noFill/>
         </p:spPr>
         <p:txBody>
-          <a:bodyPr wrap="square" lIns="0" rIns="0" tIns="0" bIns="0">
+          <a:bodyPr wrap="square" lIns="0" tIns="0" rIns="0" bIns="0">
             <a:spAutoFit/>
           </a:bodyPr>
           <a:lstStyle/>
@@ -13356,7 +13541,7 @@
           <a:noFill/>
         </p:spPr>
         <p:txBody>
-          <a:bodyPr wrap="square" lIns="0" rIns="0" tIns="0" bIns="0">
+          <a:bodyPr wrap="square" lIns="0" tIns="0" rIns="0" bIns="0">
             <a:spAutoFit/>
           </a:bodyPr>
           <a:lstStyle/>
@@ -13395,7 +13580,7 @@
           <a:noFill/>
         </p:spPr>
         <p:txBody>
-          <a:bodyPr wrap="square" lIns="0" rIns="0" tIns="0" bIns="0">
+          <a:bodyPr wrap="square" lIns="0" tIns="0" rIns="0" bIns="0">
             <a:spAutoFit/>
           </a:bodyPr>
           <a:lstStyle/>
@@ -13458,6 +13643,7 @@
           <a:lstStyle/>
           <a:p>
             <a:pPr algn="ctr"/>
+            <a:endParaRPr/>
           </a:p>
         </p:txBody>
       </p:sp>
@@ -13478,7 +13664,7 @@
           <a:noFill/>
         </p:spPr>
         <p:txBody>
-          <a:bodyPr wrap="square" lIns="0" rIns="0" tIns="0" bIns="0">
+          <a:bodyPr wrap="square" lIns="0" tIns="0" rIns="0" bIns="0">
             <a:spAutoFit/>
           </a:bodyPr>
           <a:lstStyle/>
@@ -13517,7 +13703,7 @@
           <a:noFill/>
         </p:spPr>
         <p:txBody>
-          <a:bodyPr wrap="square" lIns="0" rIns="0" tIns="0" bIns="0">
+          <a:bodyPr wrap="square" lIns="0" tIns="0" rIns="0" bIns="0">
             <a:spAutoFit/>
           </a:bodyPr>
           <a:lstStyle/>
@@ -13556,7 +13742,7 @@
           <a:noFill/>
         </p:spPr>
         <p:txBody>
-          <a:bodyPr wrap="square" lIns="0" rIns="0" tIns="0" bIns="0">
+          <a:bodyPr wrap="square" lIns="0" tIns="0" rIns="0" bIns="0">
             <a:spAutoFit/>
           </a:bodyPr>
           <a:lstStyle/>
@@ -13595,7 +13781,7 @@
           <a:noFill/>
         </p:spPr>
         <p:txBody>
-          <a:bodyPr wrap="square" lIns="0" rIns="0" tIns="0" bIns="0">
+          <a:bodyPr wrap="square" lIns="0" tIns="0" rIns="0" bIns="0">
             <a:spAutoFit/>
           </a:bodyPr>
           <a:lstStyle/>
@@ -13634,7 +13820,7 @@
           <a:noFill/>
         </p:spPr>
         <p:txBody>
-          <a:bodyPr wrap="square" lIns="0" rIns="0" tIns="0" bIns="0">
+          <a:bodyPr wrap="square" lIns="0" tIns="0" rIns="0" bIns="0">
             <a:spAutoFit/>
           </a:bodyPr>
           <a:lstStyle/>
@@ -13673,7 +13859,7 @@
           <a:noFill/>
         </p:spPr>
         <p:txBody>
-          <a:bodyPr wrap="square" lIns="0" rIns="0" tIns="0" bIns="0">
+          <a:bodyPr wrap="square" lIns="0" tIns="0" rIns="0" bIns="0">
             <a:spAutoFit/>
           </a:bodyPr>
           <a:lstStyle/>
@@ -13712,7 +13898,7 @@
           <a:noFill/>
         </p:spPr>
         <p:txBody>
-          <a:bodyPr wrap="square" lIns="0" rIns="0" tIns="0" bIns="0">
+          <a:bodyPr wrap="square" lIns="0" tIns="0" rIns="0" bIns="0">
             <a:spAutoFit/>
           </a:bodyPr>
           <a:lstStyle/>
@@ -13751,7 +13937,7 @@
           <a:noFill/>
         </p:spPr>
         <p:txBody>
-          <a:bodyPr wrap="square" lIns="0" rIns="0" tIns="0" bIns="0">
+          <a:bodyPr wrap="square" lIns="0" tIns="0" rIns="0" bIns="0">
             <a:spAutoFit/>
           </a:bodyPr>
           <a:lstStyle/>
@@ -13814,6 +14000,7 @@
           <a:lstStyle/>
           <a:p>
             <a:pPr algn="ctr"/>
+            <a:endParaRPr/>
           </a:p>
         </p:txBody>
       </p:sp>
@@ -13834,7 +14021,7 @@
           <a:noFill/>
         </p:spPr>
         <p:txBody>
-          <a:bodyPr wrap="square" lIns="0" rIns="0" tIns="0" bIns="0">
+          <a:bodyPr wrap="square" lIns="0" tIns="0" rIns="0" bIns="0">
             <a:spAutoFit/>
           </a:bodyPr>
           <a:lstStyle/>
@@ -13873,7 +14060,7 @@
           <a:noFill/>
         </p:spPr>
         <p:txBody>
-          <a:bodyPr wrap="square" lIns="0" rIns="0" tIns="0" bIns="0">
+          <a:bodyPr wrap="square" lIns="0" tIns="0" rIns="0" bIns="0">
             <a:spAutoFit/>
           </a:bodyPr>
           <a:lstStyle/>
@@ -13912,7 +14099,7 @@
           <a:noFill/>
         </p:spPr>
         <p:txBody>
-          <a:bodyPr wrap="square" lIns="0" rIns="0" tIns="0" bIns="0">
+          <a:bodyPr wrap="square" lIns="0" tIns="0" rIns="0" bIns="0">
             <a:spAutoFit/>
           </a:bodyPr>
           <a:lstStyle/>
@@ -13951,7 +14138,7 @@
           <a:noFill/>
         </p:spPr>
         <p:txBody>
-          <a:bodyPr wrap="square" lIns="0" rIns="0" tIns="0" bIns="0">
+          <a:bodyPr wrap="square" lIns="0" tIns="0" rIns="0" bIns="0">
             <a:spAutoFit/>
           </a:bodyPr>
           <a:lstStyle/>
@@ -13990,7 +14177,7 @@
           <a:noFill/>
         </p:spPr>
         <p:txBody>
-          <a:bodyPr wrap="square" lIns="0" rIns="0" tIns="0" bIns="0">
+          <a:bodyPr wrap="square" lIns="0" tIns="0" rIns="0" bIns="0">
             <a:spAutoFit/>
           </a:bodyPr>
           <a:lstStyle/>
@@ -14029,7 +14216,7 @@
           <a:noFill/>
         </p:spPr>
         <p:txBody>
-          <a:bodyPr wrap="square" lIns="0" rIns="0" tIns="0" bIns="0">
+          <a:bodyPr wrap="square" lIns="0" tIns="0" rIns="0" bIns="0">
             <a:spAutoFit/>
           </a:bodyPr>
           <a:lstStyle/>
@@ -14068,7 +14255,7 @@
           <a:noFill/>
         </p:spPr>
         <p:txBody>
-          <a:bodyPr wrap="square" lIns="0" rIns="0" tIns="0" bIns="0">
+          <a:bodyPr wrap="square" lIns="0" tIns="0" rIns="0" bIns="0">
             <a:spAutoFit/>
           </a:bodyPr>
           <a:lstStyle/>
@@ -14107,7 +14294,7 @@
           <a:noFill/>
         </p:spPr>
         <p:txBody>
-          <a:bodyPr wrap="square" lIns="0" rIns="0" tIns="0" bIns="0">
+          <a:bodyPr wrap="square" lIns="0" tIns="0" rIns="0" bIns="0">
             <a:spAutoFit/>
           </a:bodyPr>
           <a:lstStyle/>
@@ -14170,6 +14357,7 @@
           <a:lstStyle/>
           <a:p>
             <a:pPr algn="ctr"/>
+            <a:endParaRPr/>
           </a:p>
         </p:txBody>
       </p:sp>
@@ -14190,7 +14378,7 @@
           <a:noFill/>
         </p:spPr>
         <p:txBody>
-          <a:bodyPr wrap="square" lIns="0" rIns="0" tIns="0" bIns="0">
+          <a:bodyPr wrap="square" lIns="0" tIns="0" rIns="0" bIns="0">
             <a:spAutoFit/>
           </a:bodyPr>
           <a:lstStyle/>
@@ -14229,7 +14417,7 @@
           <a:noFill/>
         </p:spPr>
         <p:txBody>
-          <a:bodyPr wrap="square" lIns="0" rIns="0" tIns="0" bIns="0">
+          <a:bodyPr wrap="square" lIns="0" tIns="0" rIns="0" bIns="0">
             <a:spAutoFit/>
           </a:bodyPr>
           <a:lstStyle/>
@@ -14268,7 +14456,7 @@
           <a:noFill/>
         </p:spPr>
         <p:txBody>
-          <a:bodyPr wrap="square" lIns="0" rIns="0" tIns="0" bIns="0">
+          <a:bodyPr wrap="square" lIns="0" tIns="0" rIns="0" bIns="0">
             <a:spAutoFit/>
           </a:bodyPr>
           <a:lstStyle/>
@@ -14307,7 +14495,7 @@
           <a:noFill/>
         </p:spPr>
         <p:txBody>
-          <a:bodyPr wrap="square" lIns="0" rIns="0" tIns="0" bIns="0">
+          <a:bodyPr wrap="square" lIns="0" tIns="0" rIns="0" bIns="0">
             <a:spAutoFit/>
           </a:bodyPr>
           <a:lstStyle/>
@@ -14346,7 +14534,7 @@
           <a:noFill/>
         </p:spPr>
         <p:txBody>
-          <a:bodyPr wrap="square" lIns="0" rIns="0" tIns="0" bIns="0">
+          <a:bodyPr wrap="square" lIns="0" tIns="0" rIns="0" bIns="0">
             <a:spAutoFit/>
           </a:bodyPr>
           <a:lstStyle/>
@@ -14385,7 +14573,7 @@
           <a:noFill/>
         </p:spPr>
         <p:txBody>
-          <a:bodyPr wrap="square" lIns="0" rIns="0" tIns="0" bIns="0">
+          <a:bodyPr wrap="square" lIns="0" tIns="0" rIns="0" bIns="0">
             <a:spAutoFit/>
           </a:bodyPr>
           <a:lstStyle/>
@@ -14424,7 +14612,7 @@
           <a:noFill/>
         </p:spPr>
         <p:txBody>
-          <a:bodyPr wrap="square" lIns="0" rIns="0" tIns="0" bIns="0">
+          <a:bodyPr wrap="square" lIns="0" tIns="0" rIns="0" bIns="0">
             <a:spAutoFit/>
           </a:bodyPr>
           <a:lstStyle/>
@@ -14463,7 +14651,7 @@
           <a:noFill/>
         </p:spPr>
         <p:txBody>
-          <a:bodyPr wrap="square" lIns="0" rIns="0" tIns="0" bIns="0">
+          <a:bodyPr wrap="square" lIns="0" tIns="0" rIns="0" bIns="0">
             <a:spAutoFit/>
           </a:bodyPr>
           <a:lstStyle/>
@@ -14526,6 +14714,7 @@
           <a:lstStyle/>
           <a:p>
             <a:pPr algn="ctr"/>
+            <a:endParaRPr/>
           </a:p>
         </p:txBody>
       </p:sp>
@@ -14570,6 +14759,7 @@
           <a:lstStyle/>
           <a:p>
             <a:pPr algn="ctr"/>
+            <a:endParaRPr/>
           </a:p>
         </p:txBody>
       </p:sp>
@@ -14590,7 +14780,7 @@
           <a:noFill/>
         </p:spPr>
         <p:txBody>
-          <a:bodyPr wrap="square" lIns="0" rIns="0" tIns="0" bIns="0">
+          <a:bodyPr wrap="square" lIns="0" tIns="0" rIns="0" bIns="0">
             <a:spAutoFit/>
           </a:bodyPr>
           <a:lstStyle/>
@@ -14629,7 +14819,7 @@
           <a:noFill/>
         </p:spPr>
         <p:txBody>
-          <a:bodyPr wrap="square" lIns="0" rIns="0" tIns="0" bIns="0">
+          <a:bodyPr wrap="square" lIns="0" tIns="0" rIns="0" bIns="0">
             <a:spAutoFit/>
           </a:bodyPr>
           <a:lstStyle/>
@@ -14724,7 +14914,7 @@
 </file>
 
 <file path=ppt/slides/slide4.xml><?xml version="1.0" encoding="utf-8"?>
-<p:sld xmlns:a="http://schemas.openxmlformats.org/drawingml/2006/main" xmlns:p="http://schemas.openxmlformats.org/presentationml/2006/main" xmlns:r="http://schemas.openxmlformats.org/officeDocument/2006/relationships">
+<p:sld xmlns:a="http://schemas.openxmlformats.org/drawingml/2006/main" xmlns:r="http://schemas.openxmlformats.org/officeDocument/2006/relationships" xmlns:p="http://schemas.openxmlformats.org/presentationml/2006/main">
   <p:cSld>
     <p:spTree>
       <p:nvGrpSpPr>
@@ -14732,7 +14922,14 @@
         <p:cNvGrpSpPr/>
         <p:nvPr/>
       </p:nvGrpSpPr>
-      <p:grpSpPr/>
+      <p:grpSpPr>
+        <a:xfrm>
+          <a:off x="0" y="0"/>
+          <a:ext cx="0" cy="0"/>
+          <a:chOff x="0" y="0"/>
+          <a:chExt cx="0" cy="0"/>
+        </a:xfrm>
+      </p:grpSpPr>
       <p:sp>
         <p:nvSpPr>
           <p:cNvPr id="2" name="Rectangle 1"/>
@@ -14774,6 +14971,7 @@
           <a:lstStyle/>
           <a:p>
             <a:pPr algn="ctr"/>
+            <a:endParaRPr/>
           </a:p>
         </p:txBody>
       </p:sp>
@@ -14794,7 +14992,7 @@
           <a:noFill/>
         </p:spPr>
         <p:txBody>
-          <a:bodyPr wrap="square" lIns="0" rIns="0" tIns="0" bIns="0">
+          <a:bodyPr wrap="square" lIns="0" tIns="0" rIns="0" bIns="0">
             <a:spAutoFit/>
           </a:bodyPr>
           <a:lstStyle/>
@@ -14833,7 +15031,7 @@
           <a:noFill/>
         </p:spPr>
         <p:txBody>
-          <a:bodyPr wrap="square" lIns="0" rIns="0" tIns="0" bIns="0">
+          <a:bodyPr wrap="square" lIns="0" tIns="0" rIns="0" bIns="0">
             <a:spAutoFit/>
           </a:bodyPr>
           <a:lstStyle/>
@@ -14896,6 +15094,7 @@
           <a:lstStyle/>
           <a:p>
             <a:pPr algn="ctr"/>
+            <a:endParaRPr/>
           </a:p>
         </p:txBody>
       </p:sp>
@@ -14916,7 +15115,7 @@
           <a:noFill/>
         </p:spPr>
         <p:txBody>
-          <a:bodyPr wrap="square" lIns="0" rIns="0" tIns="0" bIns="0">
+          <a:bodyPr wrap="square" lIns="0" tIns="0" rIns="0" bIns="0">
             <a:spAutoFit/>
           </a:bodyPr>
           <a:lstStyle/>
@@ -14955,7 +15154,7 @@
           <a:noFill/>
         </p:spPr>
         <p:txBody>
-          <a:bodyPr wrap="square" lIns="0" rIns="0" tIns="0" bIns="0">
+          <a:bodyPr wrap="square" lIns="0" tIns="0" rIns="0" bIns="0">
             <a:spAutoFit/>
           </a:bodyPr>
           <a:lstStyle/>
@@ -15018,6 +15217,7 @@
           <a:lstStyle/>
           <a:p>
             <a:pPr algn="ctr"/>
+            <a:endParaRPr/>
           </a:p>
         </p:txBody>
       </p:sp>
@@ -15062,6 +15262,7 @@
           <a:lstStyle/>
           <a:p>
             <a:pPr algn="ctr"/>
+            <a:endParaRPr/>
           </a:p>
         </p:txBody>
       </p:sp>
@@ -15082,7 +15283,7 @@
           <a:noFill/>
         </p:spPr>
         <p:txBody>
-          <a:bodyPr wrap="square" lIns="0" rIns="0" tIns="0" bIns="0">
+          <a:bodyPr wrap="square" lIns="0" tIns="0" rIns="0" bIns="0">
             <a:spAutoFit/>
           </a:bodyPr>
           <a:lstStyle/>
@@ -15121,7 +15322,7 @@
           <a:noFill/>
         </p:spPr>
         <p:txBody>
-          <a:bodyPr wrap="square" lIns="0" rIns="0" tIns="0" bIns="0">
+          <a:bodyPr wrap="square" lIns="0" tIns="0" rIns="0" bIns="0">
             <a:spAutoFit/>
           </a:bodyPr>
           <a:lstStyle/>
@@ -15216,6 +15417,7 @@
           <a:lstStyle/>
           <a:p>
             <a:pPr algn="ctr"/>
+            <a:endParaRPr/>
           </a:p>
         </p:txBody>
       </p:sp>
@@ -15260,6 +15462,7 @@
           <a:lstStyle/>
           <a:p>
             <a:pPr algn="ctr"/>
+            <a:endParaRPr/>
           </a:p>
         </p:txBody>
       </p:sp>
@@ -15280,7 +15483,7 @@
           <a:noFill/>
         </p:spPr>
         <p:txBody>
-          <a:bodyPr wrap="square" lIns="0" rIns="0" tIns="0" bIns="0">
+          <a:bodyPr wrap="square" lIns="0" tIns="0" rIns="0" bIns="0">
             <a:spAutoFit/>
           </a:bodyPr>
           <a:lstStyle/>
@@ -15319,7 +15522,7 @@
           <a:noFill/>
         </p:spPr>
         <p:txBody>
-          <a:bodyPr wrap="square" lIns="0" rIns="0" tIns="0" bIns="0">
+          <a:bodyPr wrap="square" lIns="0" tIns="0" rIns="0" bIns="0">
             <a:spAutoFit/>
           </a:bodyPr>
           <a:lstStyle/>
@@ -15414,6 +15617,7 @@
           <a:lstStyle/>
           <a:p>
             <a:pPr algn="ctr"/>
+            <a:endParaRPr/>
           </a:p>
         </p:txBody>
       </p:sp>
@@ -15458,6 +15662,7 @@
           <a:lstStyle/>
           <a:p>
             <a:pPr algn="ctr"/>
+            <a:endParaRPr/>
           </a:p>
         </p:txBody>
       </p:sp>
@@ -15478,7 +15683,7 @@
           <a:noFill/>
         </p:spPr>
         <p:txBody>
-          <a:bodyPr wrap="square" lIns="0" rIns="0" tIns="0" bIns="0">
+          <a:bodyPr wrap="square" lIns="0" tIns="0" rIns="0" bIns="0">
             <a:spAutoFit/>
           </a:bodyPr>
           <a:lstStyle/>
@@ -15517,7 +15722,7 @@
           <a:noFill/>
         </p:spPr>
         <p:txBody>
-          <a:bodyPr wrap="square" lIns="0" rIns="0" tIns="0" bIns="0">
+          <a:bodyPr wrap="square" lIns="0" tIns="0" rIns="0" bIns="0">
             <a:spAutoFit/>
           </a:bodyPr>
           <a:lstStyle/>
@@ -15580,7 +15785,7 @@
 </file>
 
 <file path=ppt/slides/slide5.xml><?xml version="1.0" encoding="utf-8"?>
-<p:sld xmlns:a="http://schemas.openxmlformats.org/drawingml/2006/main" xmlns:p="http://schemas.openxmlformats.org/presentationml/2006/main" xmlns:r="http://schemas.openxmlformats.org/officeDocument/2006/relationships">
+<p:sld xmlns:a="http://schemas.openxmlformats.org/drawingml/2006/main" xmlns:r="http://schemas.openxmlformats.org/officeDocument/2006/relationships" xmlns:p="http://schemas.openxmlformats.org/presentationml/2006/main">
   <p:cSld>
     <p:spTree>
       <p:nvGrpSpPr>
@@ -15588,7 +15793,14 @@
         <p:cNvGrpSpPr/>
         <p:nvPr/>
       </p:nvGrpSpPr>
-      <p:grpSpPr/>
+      <p:grpSpPr>
+        <a:xfrm>
+          <a:off x="0" y="0"/>
+          <a:ext cx="0" cy="0"/>
+          <a:chOff x="0" y="0"/>
+          <a:chExt cx="0" cy="0"/>
+        </a:xfrm>
+      </p:grpSpPr>
       <p:sp>
         <p:nvSpPr>
           <p:cNvPr id="2" name="Rectangle 1"/>
@@ -15630,6 +15842,7 @@
           <a:lstStyle/>
           <a:p>
             <a:pPr algn="ctr"/>
+            <a:endParaRPr/>
           </a:p>
         </p:txBody>
       </p:sp>
@@ -15650,7 +15863,7 @@
           <a:noFill/>
         </p:spPr>
         <p:txBody>
-          <a:bodyPr wrap="square" lIns="0" rIns="0" tIns="0" bIns="0">
+          <a:bodyPr wrap="square" lIns="0" tIns="0" rIns="0" bIns="0">
             <a:spAutoFit/>
           </a:bodyPr>
           <a:lstStyle/>
@@ -15689,7 +15902,7 @@
           <a:noFill/>
         </p:spPr>
         <p:txBody>
-          <a:bodyPr wrap="square" lIns="0" rIns="0" tIns="0" bIns="0">
+          <a:bodyPr wrap="square" lIns="0" tIns="0" rIns="0" bIns="0">
             <a:spAutoFit/>
           </a:bodyPr>
           <a:lstStyle/>
@@ -15752,6 +15965,7 @@
           <a:lstStyle/>
           <a:p>
             <a:pPr algn="ctr"/>
+            <a:endParaRPr/>
           </a:p>
         </p:txBody>
       </p:sp>
@@ -15772,7 +15986,7 @@
           <a:noFill/>
         </p:spPr>
         <p:txBody>
-          <a:bodyPr wrap="square" lIns="0" rIns="0" tIns="0" bIns="0">
+          <a:bodyPr wrap="square" lIns="0" tIns="0" rIns="0" bIns="0">
             <a:spAutoFit/>
           </a:bodyPr>
           <a:lstStyle/>
@@ -15811,7 +16025,7 @@
           <a:noFill/>
         </p:spPr>
         <p:txBody>
-          <a:bodyPr wrap="square" lIns="0" rIns="0" tIns="0" bIns="0">
+          <a:bodyPr wrap="square" lIns="0" tIns="0" rIns="0" bIns="0">
             <a:spAutoFit/>
           </a:bodyPr>
           <a:lstStyle/>
@@ -15874,6 +16088,7 @@
           <a:lstStyle/>
           <a:p>
             <a:pPr algn="ctr"/>
+            <a:endParaRPr/>
           </a:p>
         </p:txBody>
       </p:sp>
@@ -15894,7 +16109,7 @@
           <a:noFill/>
         </p:spPr>
         <p:txBody>
-          <a:bodyPr wrap="square" lIns="0" rIns="0" tIns="0" bIns="0">
+          <a:bodyPr wrap="square" lIns="0" tIns="0" rIns="0" bIns="0">
             <a:spAutoFit/>
           </a:bodyPr>
           <a:lstStyle/>
@@ -15933,7 +16148,7 @@
           <a:noFill/>
         </p:spPr>
         <p:txBody>
-          <a:bodyPr wrap="square" lIns="0" rIns="0" tIns="0" bIns="0">
+          <a:bodyPr wrap="square" lIns="0" tIns="0" rIns="0" bIns="0">
             <a:spAutoFit/>
           </a:bodyPr>
           <a:lstStyle/>
@@ -15972,7 +16187,7 @@
           <a:noFill/>
         </p:spPr>
         <p:txBody>
-          <a:bodyPr wrap="square" lIns="0" rIns="0" tIns="0" bIns="0">
+          <a:bodyPr wrap="square" lIns="0" tIns="0" rIns="0" bIns="0">
             <a:spAutoFit/>
           </a:bodyPr>
           <a:lstStyle/>
@@ -16011,7 +16226,7 @@
           <a:noFill/>
         </p:spPr>
         <p:txBody>
-          <a:bodyPr wrap="square" lIns="0" rIns="0" tIns="0" bIns="0">
+          <a:bodyPr wrap="square" lIns="0" tIns="0" rIns="0" bIns="0">
             <a:spAutoFit/>
           </a:bodyPr>
           <a:lstStyle/>
@@ -16074,6 +16289,7 @@
           <a:lstStyle/>
           <a:p>
             <a:pPr algn="ctr"/>
+            <a:endParaRPr/>
           </a:p>
         </p:txBody>
       </p:sp>
@@ -16094,7 +16310,7 @@
           <a:noFill/>
         </p:spPr>
         <p:txBody>
-          <a:bodyPr wrap="square" lIns="0" rIns="0" tIns="0" bIns="0">
+          <a:bodyPr wrap="square" lIns="0" tIns="0" rIns="0" bIns="0">
             <a:spAutoFit/>
           </a:bodyPr>
           <a:lstStyle/>
@@ -16133,7 +16349,7 @@
           <a:noFill/>
         </p:spPr>
         <p:txBody>
-          <a:bodyPr wrap="square" lIns="0" rIns="0" tIns="0" bIns="0">
+          <a:bodyPr wrap="square" lIns="0" tIns="0" rIns="0" bIns="0">
             <a:spAutoFit/>
           </a:bodyPr>
           <a:lstStyle/>
@@ -16172,7 +16388,7 @@
           <a:noFill/>
         </p:spPr>
         <p:txBody>
-          <a:bodyPr wrap="square" lIns="0" rIns="0" tIns="0" bIns="0">
+          <a:bodyPr wrap="square" lIns="0" tIns="0" rIns="0" bIns="0">
             <a:spAutoFit/>
           </a:bodyPr>
           <a:lstStyle/>
@@ -16211,7 +16427,7 @@
           <a:noFill/>
         </p:spPr>
         <p:txBody>
-          <a:bodyPr wrap="square" lIns="0" rIns="0" tIns="0" bIns="0">
+          <a:bodyPr wrap="square" lIns="0" tIns="0" rIns="0" bIns="0">
             <a:spAutoFit/>
           </a:bodyPr>
           <a:lstStyle/>
@@ -16274,6 +16490,7 @@
           <a:lstStyle/>
           <a:p>
             <a:pPr algn="ctr"/>
+            <a:endParaRPr/>
           </a:p>
         </p:txBody>
       </p:sp>
@@ -16294,7 +16511,7 @@
           <a:noFill/>
         </p:spPr>
         <p:txBody>
-          <a:bodyPr wrap="square" lIns="0" rIns="0" tIns="0" bIns="0">
+          <a:bodyPr wrap="square" lIns="0" tIns="0" rIns="0" bIns="0">
             <a:spAutoFit/>
           </a:bodyPr>
           <a:lstStyle/>
@@ -16333,7 +16550,7 @@
           <a:noFill/>
         </p:spPr>
         <p:txBody>
-          <a:bodyPr wrap="square" lIns="0" rIns="0" tIns="0" bIns="0">
+          <a:bodyPr wrap="square" lIns="0" tIns="0" rIns="0" bIns="0">
             <a:spAutoFit/>
           </a:bodyPr>
           <a:lstStyle/>
@@ -16372,7 +16589,7 @@
           <a:noFill/>
         </p:spPr>
         <p:txBody>
-          <a:bodyPr wrap="square" lIns="0" rIns="0" tIns="0" bIns="0">
+          <a:bodyPr wrap="square" lIns="0" tIns="0" rIns="0" bIns="0">
             <a:spAutoFit/>
           </a:bodyPr>
           <a:lstStyle/>
@@ -16411,7 +16628,7 @@
           <a:noFill/>
         </p:spPr>
         <p:txBody>
-          <a:bodyPr wrap="square" lIns="0" rIns="0" tIns="0" bIns="0">
+          <a:bodyPr wrap="square" lIns="0" tIns="0" rIns="0" bIns="0">
             <a:spAutoFit/>
           </a:bodyPr>
           <a:lstStyle/>
@@ -16474,6 +16691,7 @@
           <a:lstStyle/>
           <a:p>
             <a:pPr algn="ctr"/>
+            <a:endParaRPr/>
           </a:p>
         </p:txBody>
       </p:sp>
@@ -16518,6 +16736,7 @@
           <a:lstStyle/>
           <a:p>
             <a:pPr algn="ctr"/>
+            <a:endParaRPr/>
           </a:p>
         </p:txBody>
       </p:sp>
@@ -16538,7 +16757,7 @@
           <a:noFill/>
         </p:spPr>
         <p:txBody>
-          <a:bodyPr wrap="square" lIns="0" rIns="0" tIns="0" bIns="0">
+          <a:bodyPr wrap="square" lIns="0" tIns="0" rIns="0" bIns="0">
             <a:spAutoFit/>
           </a:bodyPr>
           <a:lstStyle/>
@@ -16577,7 +16796,7 @@
           <a:noFill/>
         </p:spPr>
         <p:txBody>
-          <a:bodyPr wrap="square" lIns="0" rIns="0" tIns="0" bIns="0">
+          <a:bodyPr wrap="square" lIns="0" tIns="0" rIns="0" bIns="0">
             <a:spAutoFit/>
           </a:bodyPr>
           <a:lstStyle/>
@@ -16672,7 +16891,7 @@
 </file>
 
 <file path=ppt/slides/slide6.xml><?xml version="1.0" encoding="utf-8"?>
-<p:sld xmlns:a="http://schemas.openxmlformats.org/drawingml/2006/main" xmlns:p="http://schemas.openxmlformats.org/presentationml/2006/main" xmlns:r="http://schemas.openxmlformats.org/officeDocument/2006/relationships">
+<p:sld xmlns:a="http://schemas.openxmlformats.org/drawingml/2006/main" xmlns:r="http://schemas.openxmlformats.org/officeDocument/2006/relationships" xmlns:p="http://schemas.openxmlformats.org/presentationml/2006/main">
   <p:cSld>
     <p:spTree>
       <p:nvGrpSpPr>
@@ -16680,7 +16899,14 @@
         <p:cNvGrpSpPr/>
         <p:nvPr/>
       </p:nvGrpSpPr>
-      <p:grpSpPr/>
+      <p:grpSpPr>
+        <a:xfrm>
+          <a:off x="0" y="0"/>
+          <a:ext cx="0" cy="0"/>
+          <a:chOff x="0" y="0"/>
+          <a:chExt cx="0" cy="0"/>
+        </a:xfrm>
+      </p:grpSpPr>
       <p:sp>
         <p:nvSpPr>
           <p:cNvPr id="2" name="Rectangle 1"/>
@@ -16722,6 +16948,7 @@
           <a:lstStyle/>
           <a:p>
             <a:pPr algn="ctr"/>
+            <a:endParaRPr/>
           </a:p>
         </p:txBody>
       </p:sp>
@@ -16742,7 +16969,7 @@
           <a:noFill/>
         </p:spPr>
         <p:txBody>
-          <a:bodyPr wrap="square" lIns="0" rIns="0" tIns="0" bIns="0">
+          <a:bodyPr wrap="square" lIns="0" tIns="0" rIns="0" bIns="0">
             <a:spAutoFit/>
           </a:bodyPr>
           <a:lstStyle/>
@@ -16781,7 +17008,7 @@
           <a:noFill/>
         </p:spPr>
         <p:txBody>
-          <a:bodyPr wrap="square" lIns="0" rIns="0" tIns="0" bIns="0">
+          <a:bodyPr wrap="square" lIns="0" tIns="0" rIns="0" bIns="0">
             <a:spAutoFit/>
           </a:bodyPr>
           <a:lstStyle/>
@@ -16844,6 +17071,7 @@
           <a:lstStyle/>
           <a:p>
             <a:pPr algn="ctr"/>
+            <a:endParaRPr/>
           </a:p>
         </p:txBody>
       </p:sp>
@@ -16864,7 +17092,7 @@
           <a:noFill/>
         </p:spPr>
         <p:txBody>
-          <a:bodyPr wrap="square" lIns="0" rIns="0" tIns="0" bIns="0">
+          <a:bodyPr wrap="square" lIns="0" tIns="0" rIns="0" bIns="0">
             <a:spAutoFit/>
           </a:bodyPr>
           <a:lstStyle/>
@@ -16903,7 +17131,7 @@
           <a:noFill/>
         </p:spPr>
         <p:txBody>
-          <a:bodyPr wrap="square" lIns="0" rIns="0" tIns="0" bIns="0">
+          <a:bodyPr wrap="square" lIns="0" tIns="0" rIns="0" bIns="0">
             <a:spAutoFit/>
           </a:bodyPr>
           <a:lstStyle/>
@@ -16966,6 +17194,7 @@
           <a:lstStyle/>
           <a:p>
             <a:pPr algn="ctr"/>
+            <a:endParaRPr/>
           </a:p>
         </p:txBody>
       </p:sp>
@@ -16986,7 +17215,7 @@
           <a:noFill/>
         </p:spPr>
         <p:txBody>
-          <a:bodyPr wrap="square" lIns="0" rIns="0" tIns="0" bIns="0">
+          <a:bodyPr wrap="square" lIns="0" tIns="0" rIns="0" bIns="0">
             <a:spAutoFit/>
           </a:bodyPr>
           <a:lstStyle/>
@@ -17025,7 +17254,7 @@
           <a:noFill/>
         </p:spPr>
         <p:txBody>
-          <a:bodyPr wrap="square" lIns="0" rIns="0" tIns="0" bIns="0">
+          <a:bodyPr wrap="square" lIns="0" tIns="0" rIns="0" bIns="0">
             <a:spAutoFit/>
           </a:bodyPr>
           <a:lstStyle/>
@@ -17064,7 +17293,7 @@
           <a:noFill/>
         </p:spPr>
         <p:txBody>
-          <a:bodyPr wrap="square" lIns="0" rIns="0" tIns="0" bIns="0">
+          <a:bodyPr wrap="square" lIns="0" tIns="0" rIns="0" bIns="0">
             <a:spAutoFit/>
           </a:bodyPr>
           <a:lstStyle/>
@@ -17103,7 +17332,7 @@
           <a:noFill/>
         </p:spPr>
         <p:txBody>
-          <a:bodyPr wrap="square" lIns="0" rIns="0" tIns="0" bIns="0">
+          <a:bodyPr wrap="square" lIns="0" tIns="0" rIns="0" bIns="0">
             <a:spAutoFit/>
           </a:bodyPr>
           <a:lstStyle/>
@@ -17166,6 +17395,7 @@
           <a:lstStyle/>
           <a:p>
             <a:pPr algn="ctr"/>
+            <a:endParaRPr/>
           </a:p>
         </p:txBody>
       </p:sp>
@@ -17186,7 +17416,7 @@
           <a:noFill/>
         </p:spPr>
         <p:txBody>
-          <a:bodyPr wrap="square" lIns="0" rIns="0" tIns="0" bIns="0">
+          <a:bodyPr wrap="square" lIns="0" tIns="0" rIns="0" bIns="0">
             <a:spAutoFit/>
           </a:bodyPr>
           <a:lstStyle/>
@@ -17225,7 +17455,7 @@
           <a:noFill/>
         </p:spPr>
         <p:txBody>
-          <a:bodyPr wrap="square" lIns="0" rIns="0" tIns="0" bIns="0">
+          <a:bodyPr wrap="square" lIns="0" tIns="0" rIns="0" bIns="0">
             <a:spAutoFit/>
           </a:bodyPr>
           <a:lstStyle/>
@@ -17264,7 +17494,7 @@
           <a:noFill/>
         </p:spPr>
         <p:txBody>
-          <a:bodyPr wrap="square" lIns="0" rIns="0" tIns="0" bIns="0">
+          <a:bodyPr wrap="square" lIns="0" tIns="0" rIns="0" bIns="0">
             <a:spAutoFit/>
           </a:bodyPr>
           <a:lstStyle/>
@@ -17303,7 +17533,7 @@
           <a:noFill/>
         </p:spPr>
         <p:txBody>
-          <a:bodyPr wrap="square" lIns="0" rIns="0" tIns="0" bIns="0">
+          <a:bodyPr wrap="square" lIns="0" tIns="0" rIns="0" bIns="0">
             <a:spAutoFit/>
           </a:bodyPr>
           <a:lstStyle/>
@@ -17366,6 +17596,7 @@
           <a:lstStyle/>
           <a:p>
             <a:pPr algn="ctr"/>
+            <a:endParaRPr/>
           </a:p>
         </p:txBody>
       </p:sp>
@@ -17386,7 +17617,7 @@
           <a:noFill/>
         </p:spPr>
         <p:txBody>
-          <a:bodyPr wrap="square" lIns="0" rIns="0" tIns="0" bIns="0">
+          <a:bodyPr wrap="square" lIns="0" tIns="0" rIns="0" bIns="0">
             <a:spAutoFit/>
           </a:bodyPr>
           <a:lstStyle/>
@@ -17425,7 +17656,7 @@
           <a:noFill/>
         </p:spPr>
         <p:txBody>
-          <a:bodyPr wrap="square" lIns="0" rIns="0" tIns="0" bIns="0">
+          <a:bodyPr wrap="square" lIns="0" tIns="0" rIns="0" bIns="0">
             <a:spAutoFit/>
           </a:bodyPr>
           <a:lstStyle/>
@@ -17464,7 +17695,7 @@
           <a:noFill/>
         </p:spPr>
         <p:txBody>
-          <a:bodyPr wrap="square" lIns="0" rIns="0" tIns="0" bIns="0">
+          <a:bodyPr wrap="square" lIns="0" tIns="0" rIns="0" bIns="0">
             <a:spAutoFit/>
           </a:bodyPr>
           <a:lstStyle/>
@@ -17503,7 +17734,7 @@
           <a:noFill/>
         </p:spPr>
         <p:txBody>
-          <a:bodyPr wrap="square" lIns="0" rIns="0" tIns="0" bIns="0">
+          <a:bodyPr wrap="square" lIns="0" tIns="0" rIns="0" bIns="0">
             <a:spAutoFit/>
           </a:bodyPr>
           <a:lstStyle/>
@@ -17566,6 +17797,7 @@
           <a:lstStyle/>
           <a:p>
             <a:pPr algn="ctr"/>
+            <a:endParaRPr/>
           </a:p>
         </p:txBody>
       </p:sp>
@@ -17586,7 +17818,7 @@
           <a:noFill/>
         </p:spPr>
         <p:txBody>
-          <a:bodyPr wrap="square" lIns="0" rIns="0" tIns="0" bIns="0">
+          <a:bodyPr wrap="square" lIns="0" tIns="0" rIns="0" bIns="0">
             <a:spAutoFit/>
           </a:bodyPr>
           <a:lstStyle/>
@@ -17625,7 +17857,7 @@
           <a:noFill/>
         </p:spPr>
         <p:txBody>
-          <a:bodyPr wrap="square" lIns="0" rIns="0" tIns="0" bIns="0">
+          <a:bodyPr wrap="square" lIns="0" tIns="0" rIns="0" bIns="0">
             <a:spAutoFit/>
           </a:bodyPr>
           <a:lstStyle/>
@@ -17664,7 +17896,7 @@
           <a:noFill/>
         </p:spPr>
         <p:txBody>
-          <a:bodyPr wrap="square" lIns="0" rIns="0" tIns="0" bIns="0">
+          <a:bodyPr wrap="square" lIns="0" tIns="0" rIns="0" bIns="0">
             <a:spAutoFit/>
           </a:bodyPr>
           <a:lstStyle/>
@@ -17703,7 +17935,7 @@
           <a:noFill/>
         </p:spPr>
         <p:txBody>
-          <a:bodyPr wrap="square" lIns="0" rIns="0" tIns="0" bIns="0">
+          <a:bodyPr wrap="square" lIns="0" tIns="0" rIns="0" bIns="0">
             <a:spAutoFit/>
           </a:bodyPr>
           <a:lstStyle/>
@@ -17766,6 +17998,7 @@
           <a:lstStyle/>
           <a:p>
             <a:pPr algn="ctr"/>
+            <a:endParaRPr/>
           </a:p>
         </p:txBody>
       </p:sp>
@@ -17810,6 +18043,7 @@
           <a:lstStyle/>
           <a:p>
             <a:pPr algn="ctr"/>
+            <a:endParaRPr/>
           </a:p>
         </p:txBody>
       </p:sp>
@@ -17830,7 +18064,7 @@
           <a:noFill/>
         </p:spPr>
         <p:txBody>
-          <a:bodyPr wrap="square" lIns="0" rIns="0" tIns="0" bIns="0">
+          <a:bodyPr wrap="square" lIns="0" tIns="0" rIns="0" bIns="0">
             <a:spAutoFit/>
           </a:bodyPr>
           <a:lstStyle/>
@@ -17869,7 +18103,7 @@
           <a:noFill/>
         </p:spPr>
         <p:txBody>
-          <a:bodyPr wrap="square" lIns="0" rIns="0" tIns="0" bIns="0">
+          <a:bodyPr wrap="square" lIns="0" tIns="0" rIns="0" bIns="0">
             <a:spAutoFit/>
           </a:bodyPr>
           <a:lstStyle/>
@@ -17948,7 +18182,7 @@
 </file>
 
 <file path=ppt/slides/slide7.xml><?xml version="1.0" encoding="utf-8"?>
-<p:sld xmlns:a="http://schemas.openxmlformats.org/drawingml/2006/main" xmlns:p="http://schemas.openxmlformats.org/presentationml/2006/main" xmlns:r="http://schemas.openxmlformats.org/officeDocument/2006/relationships">
+<p:sld xmlns:a="http://schemas.openxmlformats.org/drawingml/2006/main" xmlns:r="http://schemas.openxmlformats.org/officeDocument/2006/relationships" xmlns:p="http://schemas.openxmlformats.org/presentationml/2006/main">
   <p:cSld>
     <p:spTree>
       <p:nvGrpSpPr>
@@ -17956,7 +18190,14 @@
         <p:cNvGrpSpPr/>
         <p:nvPr/>
       </p:nvGrpSpPr>
-      <p:grpSpPr/>
+      <p:grpSpPr>
+        <a:xfrm>
+          <a:off x="0" y="0"/>
+          <a:ext cx="0" cy="0"/>
+          <a:chOff x="0" y="0"/>
+          <a:chExt cx="0" cy="0"/>
+        </a:xfrm>
+      </p:grpSpPr>
       <p:sp>
         <p:nvSpPr>
           <p:cNvPr id="2" name="Rectangle 1"/>
@@ -17998,6 +18239,7 @@
           <a:lstStyle/>
           <a:p>
             <a:pPr algn="ctr"/>
+            <a:endParaRPr/>
           </a:p>
         </p:txBody>
       </p:sp>
@@ -18042,6 +18284,7 @@
           <a:lstStyle/>
           <a:p>
             <a:pPr algn="ctr"/>
+            <a:endParaRPr/>
           </a:p>
         </p:txBody>
       </p:sp>
@@ -18062,7 +18305,7 @@
           <a:noFill/>
         </p:spPr>
         <p:txBody>
-          <a:bodyPr wrap="square" lIns="0" rIns="0" tIns="0" bIns="0">
+          <a:bodyPr wrap="square" lIns="0" tIns="0" rIns="0" bIns="0">
             <a:spAutoFit/>
           </a:bodyPr>
           <a:lstStyle/>
@@ -18101,7 +18344,7 @@
           <a:noFill/>
         </p:spPr>
         <p:txBody>
-          <a:bodyPr wrap="square" lIns="0" rIns="0" tIns="0" bIns="0">
+          <a:bodyPr wrap="square" lIns="0" tIns="0" rIns="0" bIns="0">
             <a:spAutoFit/>
           </a:bodyPr>
           <a:lstStyle/>
@@ -18148,7 +18391,7 @@
 </file>
 
 <file path=ppt/slides/slide8.xml><?xml version="1.0" encoding="utf-8"?>
-<p:sld xmlns:a="http://schemas.openxmlformats.org/drawingml/2006/main" xmlns:p="http://schemas.openxmlformats.org/presentationml/2006/main" xmlns:r="http://schemas.openxmlformats.org/officeDocument/2006/relationships">
+<p:sld xmlns:a="http://schemas.openxmlformats.org/drawingml/2006/main" xmlns:r="http://schemas.openxmlformats.org/officeDocument/2006/relationships" xmlns:p="http://schemas.openxmlformats.org/presentationml/2006/main">
   <p:cSld>
     <p:spTree>
       <p:nvGrpSpPr>
@@ -18156,7 +18399,14 @@
         <p:cNvGrpSpPr/>
         <p:nvPr/>
       </p:nvGrpSpPr>
-      <p:grpSpPr/>
+      <p:grpSpPr>
+        <a:xfrm>
+          <a:off x="0" y="0"/>
+          <a:ext cx="0" cy="0"/>
+          <a:chOff x="0" y="0"/>
+          <a:chExt cx="0" cy="0"/>
+        </a:xfrm>
+      </p:grpSpPr>
       <p:sp>
         <p:nvSpPr>
           <p:cNvPr id="2" name="Rectangle 1"/>
@@ -18198,6 +18448,7 @@
           <a:lstStyle/>
           <a:p>
             <a:pPr algn="ctr"/>
+            <a:endParaRPr/>
           </a:p>
         </p:txBody>
       </p:sp>
@@ -18218,7 +18469,7 @@
           <a:noFill/>
         </p:spPr>
         <p:txBody>
-          <a:bodyPr wrap="square" lIns="0" rIns="0" tIns="0" bIns="0">
+          <a:bodyPr wrap="square" lIns="0" tIns="0" rIns="0" bIns="0">
             <a:spAutoFit/>
           </a:bodyPr>
           <a:lstStyle/>
@@ -18257,7 +18508,7 @@
           <a:noFill/>
         </p:spPr>
         <p:txBody>
-          <a:bodyPr wrap="square" lIns="0" rIns="0" tIns="0" bIns="0">
+          <a:bodyPr wrap="square" lIns="0" tIns="0" rIns="0" bIns="0">
             <a:spAutoFit/>
           </a:bodyPr>
           <a:lstStyle/>
@@ -18320,6 +18571,7 @@
           <a:lstStyle/>
           <a:p>
             <a:pPr algn="ctr"/>
+            <a:endParaRPr/>
           </a:p>
         </p:txBody>
       </p:sp>
@@ -18340,7 +18592,7 @@
           <a:noFill/>
         </p:spPr>
         <p:txBody>
-          <a:bodyPr wrap="square" lIns="0" rIns="0" tIns="0" bIns="0">
+          <a:bodyPr wrap="square" lIns="0" tIns="0" rIns="0" bIns="0">
             <a:spAutoFit/>
           </a:bodyPr>
           <a:lstStyle/>
@@ -18379,7 +18631,7 @@
           <a:noFill/>
         </p:spPr>
         <p:txBody>
-          <a:bodyPr wrap="square" lIns="0" rIns="0" tIns="0" bIns="0">
+          <a:bodyPr wrap="square" lIns="0" tIns="0" rIns="0" bIns="0">
             <a:spAutoFit/>
           </a:bodyPr>
           <a:lstStyle/>
@@ -18418,7 +18670,7 @@
           <a:noFill/>
         </p:spPr>
         <p:txBody>
-          <a:bodyPr wrap="square" lIns="0" rIns="0" tIns="0" bIns="0">
+          <a:bodyPr wrap="square" lIns="0" tIns="0" rIns="0" bIns="0">
             <a:spAutoFit/>
           </a:bodyPr>
           <a:lstStyle/>
@@ -18529,6 +18781,7 @@
           <a:lstStyle/>
           <a:p>
             <a:pPr algn="ctr"/>
+            <a:endParaRPr/>
           </a:p>
         </p:txBody>
       </p:sp>
@@ -18549,7 +18802,7 @@
           <a:noFill/>
         </p:spPr>
         <p:txBody>
-          <a:bodyPr wrap="square" lIns="0" rIns="0" tIns="0" bIns="0">
+          <a:bodyPr wrap="square" lIns="0" tIns="0" rIns="0" bIns="0">
             <a:spAutoFit/>
           </a:bodyPr>
           <a:lstStyle/>
@@ -18588,7 +18841,7 @@
           <a:noFill/>
         </p:spPr>
         <p:txBody>
-          <a:bodyPr wrap="square" lIns="0" rIns="0" tIns="0" bIns="0">
+          <a:bodyPr wrap="square" lIns="0" tIns="0" rIns="0" bIns="0">
             <a:spAutoFit/>
           </a:bodyPr>
           <a:lstStyle/>
@@ -18659,7 +18912,7 @@
           <a:noFill/>
         </p:spPr>
         <p:txBody>
-          <a:bodyPr wrap="square" lIns="0" rIns="0" tIns="0" bIns="0">
+          <a:bodyPr wrap="square" lIns="0" tIns="0" rIns="0" bIns="0">
             <a:spAutoFit/>
           </a:bodyPr>
           <a:lstStyle/>
@@ -18690,7 +18943,7 @@
 </file>
 
 <file path=ppt/slides/slide9.xml><?xml version="1.0" encoding="utf-8"?>
-<p:sld xmlns:a="http://schemas.openxmlformats.org/drawingml/2006/main" xmlns:p="http://schemas.openxmlformats.org/presentationml/2006/main" xmlns:r="http://schemas.openxmlformats.org/officeDocument/2006/relationships">
+<p:sld xmlns:a="http://schemas.openxmlformats.org/drawingml/2006/main" xmlns:r="http://schemas.openxmlformats.org/officeDocument/2006/relationships" xmlns:p="http://schemas.openxmlformats.org/presentationml/2006/main">
   <p:cSld>
     <p:spTree>
       <p:nvGrpSpPr>
@@ -18698,7 +18951,14 @@
         <p:cNvGrpSpPr/>
         <p:nvPr/>
       </p:nvGrpSpPr>
-      <p:grpSpPr/>
+      <p:grpSpPr>
+        <a:xfrm>
+          <a:off x="0" y="0"/>
+          <a:ext cx="0" cy="0"/>
+          <a:chOff x="0" y="0"/>
+          <a:chExt cx="0" cy="0"/>
+        </a:xfrm>
+      </p:grpSpPr>
       <p:sp>
         <p:nvSpPr>
           <p:cNvPr id="2" name="Rectangle 1"/>
@@ -18740,6 +19000,7 @@
           <a:lstStyle/>
           <a:p>
             <a:pPr algn="ctr"/>
+            <a:endParaRPr/>
           </a:p>
         </p:txBody>
       </p:sp>
@@ -18760,7 +19021,7 @@
           <a:noFill/>
         </p:spPr>
         <p:txBody>
-          <a:bodyPr wrap="square" lIns="0" rIns="0" tIns="0" bIns="0">
+          <a:bodyPr wrap="square" lIns="0" tIns="0" rIns="0" bIns="0">
             <a:spAutoFit/>
           </a:bodyPr>
           <a:lstStyle/>
@@ -18799,7 +19060,7 @@
           <a:noFill/>
         </p:spPr>
         <p:txBody>
-          <a:bodyPr wrap="square" lIns="0" rIns="0" tIns="0" bIns="0">
+          <a:bodyPr wrap="square" lIns="0" tIns="0" rIns="0" bIns="0">
             <a:spAutoFit/>
           </a:bodyPr>
           <a:lstStyle/>
@@ -18862,6 +19123,7 @@
           <a:lstStyle/>
           <a:p>
             <a:pPr algn="ctr"/>
+            <a:endParaRPr/>
           </a:p>
         </p:txBody>
       </p:sp>
@@ -18882,7 +19144,7 @@
           <a:noFill/>
         </p:spPr>
         <p:txBody>
-          <a:bodyPr wrap="square" lIns="0" rIns="0" tIns="0" bIns="0">
+          <a:bodyPr wrap="square" lIns="0" tIns="0" rIns="0" bIns="0">
             <a:spAutoFit/>
           </a:bodyPr>
           <a:lstStyle/>
@@ -18921,7 +19183,7 @@
           <a:noFill/>
         </p:spPr>
         <p:txBody>
-          <a:bodyPr wrap="square" lIns="0" rIns="0" tIns="0" bIns="0">
+          <a:bodyPr wrap="square" lIns="0" tIns="0" rIns="0" bIns="0">
             <a:spAutoFit/>
           </a:bodyPr>
           <a:lstStyle/>
@@ -18960,7 +19222,7 @@
           <a:noFill/>
         </p:spPr>
         <p:txBody>
-          <a:bodyPr wrap="square" lIns="0" rIns="0" tIns="0" bIns="0">
+          <a:bodyPr wrap="square" lIns="0" tIns="0" rIns="0" bIns="0">
             <a:spAutoFit/>
           </a:bodyPr>
           <a:lstStyle/>
@@ -19071,6 +19333,7 @@
           <a:lstStyle/>
           <a:p>
             <a:pPr algn="ctr"/>
+            <a:endParaRPr/>
           </a:p>
         </p:txBody>
       </p:sp>
@@ -19091,7 +19354,7 @@
           <a:noFill/>
         </p:spPr>
         <p:txBody>
-          <a:bodyPr wrap="square" lIns="0" rIns="0" tIns="0" bIns="0">
+          <a:bodyPr wrap="square" lIns="0" tIns="0" rIns="0" bIns="0">
             <a:spAutoFit/>
           </a:bodyPr>
           <a:lstStyle/>
@@ -19130,7 +19393,7 @@
           <a:noFill/>
         </p:spPr>
         <p:txBody>
-          <a:bodyPr wrap="square" lIns="0" rIns="0" tIns="0" bIns="0">
+          <a:bodyPr wrap="square" lIns="0" tIns="0" rIns="0" bIns="0">
             <a:spAutoFit/>
           </a:bodyPr>
           <a:lstStyle/>
@@ -19201,7 +19464,7 @@
           <a:noFill/>
         </p:spPr>
         <p:txBody>
-          <a:bodyPr wrap="square" lIns="0" rIns="0" tIns="0" bIns="0">
+          <a:bodyPr wrap="square" lIns="0" tIns="0" rIns="0" bIns="0">
             <a:spAutoFit/>
           </a:bodyPr>
           <a:lstStyle/>
